--- a/entrega_intermedia/presentacion-intermedia-SocioUnido.pptx
+++ b/entrega_intermedia/presentacion-intermedia-SocioUnido.pptx
@@ -20,9 +20,16 @@
     <p:sldId id="268" r:id="rId14"/>
     <p:sldId id="269" r:id="rId15"/>
     <p:sldId id="270" r:id="rId16"/>
-    <p:sldId id="272" r:id="rId17"/>
-    <p:sldId id="273" r:id="rId18"/>
-    <p:sldId id="274" r:id="rId19"/>
+    <p:sldId id="271" r:id="rId17"/>
+    <p:sldId id="272" r:id="rId18"/>
+    <p:sldId id="273" r:id="rId19"/>
+    <p:sldId id="274" r:id="rId20"/>
+    <p:sldId id="275" r:id="rId21"/>
+    <p:sldId id="276" r:id="rId22"/>
+    <p:sldId id="277" r:id="rId23"/>
+    <p:sldId id="278" r:id="rId24"/>
+    <p:sldId id="279" r:id="rId25"/>
+    <p:sldId id="280" r:id="rId26"/>
   </p:sldIdLst>
   <p:sldSz cx="12192000" cy="6858000"/>
   <p:notesSz cx="6858000" cy="9144000"/>
@@ -146,7 +153,7 @@
           <p:cNvPr id="2" name="Título 1">
             <a:extLst>
               <a:ext uri="{FF2B5EF4-FFF2-40B4-BE49-F238E27FC236}">
-                <a16:creationId xmlns:a16="http://schemas.microsoft.com/office/drawing/2014/main" id="{FBB2D7D1-C684-9B4D-D35F-9059D3126907}"/>
+                <a16:creationId xmlns:a16="http://schemas.microsoft.com/office/drawing/2014/main" id="{586B3236-589C-C13E-B22E-232798EEDE75}"/>
               </a:ext>
             </a:extLst>
           </p:cNvPr>
@@ -184,7 +191,7 @@
           <p:cNvPr id="3" name="Subtítulo 2">
             <a:extLst>
               <a:ext uri="{FF2B5EF4-FFF2-40B4-BE49-F238E27FC236}">
-                <a16:creationId xmlns:a16="http://schemas.microsoft.com/office/drawing/2014/main" id="{666BB75E-BE20-639A-99AD-A91F0BF32A26}"/>
+                <a16:creationId xmlns:a16="http://schemas.microsoft.com/office/drawing/2014/main" id="{E60BC30E-1F5C-B0DE-0C4E-443E540371DB}"/>
               </a:ext>
             </a:extLst>
           </p:cNvPr>
@@ -255,7 +262,7 @@
           <p:cNvPr id="4" name="Marcador de fecha 3">
             <a:extLst>
               <a:ext uri="{FF2B5EF4-FFF2-40B4-BE49-F238E27FC236}">
-                <a16:creationId xmlns:a16="http://schemas.microsoft.com/office/drawing/2014/main" id="{98266BDF-62B6-A24A-F4F2-CA62FE343B0C}"/>
+                <a16:creationId xmlns:a16="http://schemas.microsoft.com/office/drawing/2014/main" id="{CF708076-F4CC-8BB6-ADA0-2BB5362D2994}"/>
               </a:ext>
             </a:extLst>
           </p:cNvPr>
@@ -271,7 +278,7 @@
           <a:bodyPr/>
           <a:lstStyle/>
           <a:p>
-            <a:fld id="{60E86B95-B350-4559-83F9-9817161F6D3A}" type="datetimeFigureOut">
+            <a:fld id="{306FF930-1B1D-4D9D-94F7-484F0D0B4167}" type="datetimeFigureOut">
               <a:rPr lang="es-AR" smtClean="0"/>
               <a:t>23/6/2026</a:t>
             </a:fld>
@@ -284,7 +291,7 @@
           <p:cNvPr id="5" name="Marcador de pie de página 4">
             <a:extLst>
               <a:ext uri="{FF2B5EF4-FFF2-40B4-BE49-F238E27FC236}">
-                <a16:creationId xmlns:a16="http://schemas.microsoft.com/office/drawing/2014/main" id="{59A8DDE6-7553-0719-3243-C005476367B5}"/>
+                <a16:creationId xmlns:a16="http://schemas.microsoft.com/office/drawing/2014/main" id="{08A87BBF-DA43-37AB-896E-6AAAF00C5243}"/>
               </a:ext>
             </a:extLst>
           </p:cNvPr>
@@ -309,7 +316,7 @@
           <p:cNvPr id="6" name="Marcador de número de diapositiva 5">
             <a:extLst>
               <a:ext uri="{FF2B5EF4-FFF2-40B4-BE49-F238E27FC236}">
-                <a16:creationId xmlns:a16="http://schemas.microsoft.com/office/drawing/2014/main" id="{5BED8B89-8995-AE5D-F4EE-47BA48C1F320}"/>
+                <a16:creationId xmlns:a16="http://schemas.microsoft.com/office/drawing/2014/main" id="{0E774FE5-1261-C11D-4375-FB26DE7AABDE}"/>
               </a:ext>
             </a:extLst>
           </p:cNvPr>
@@ -325,7 +332,7 @@
           <a:bodyPr/>
           <a:lstStyle/>
           <a:p>
-            <a:fld id="{C1F0B0F2-A878-43E8-A094-1791F671B38B}" type="slidenum">
+            <a:fld id="{5E747B70-7BF8-4839-B134-BDC359C860DC}" type="slidenum">
               <a:rPr lang="es-AR" smtClean="0"/>
               <a:t>‹Nº›</a:t>
             </a:fld>
@@ -336,7 +343,7 @@
     </p:spTree>
     <p:extLst>
       <p:ext uri="{BB962C8B-B14F-4D97-AF65-F5344CB8AC3E}">
-        <p14:creationId xmlns:p14="http://schemas.microsoft.com/office/powerpoint/2010/main" val="3828403565"/>
+        <p14:creationId xmlns:p14="http://schemas.microsoft.com/office/powerpoint/2010/main" val="3614564925"/>
       </p:ext>
     </p:extLst>
   </p:cSld>
@@ -368,7 +375,7 @@
           <p:cNvPr id="2" name="Título 1">
             <a:extLst>
               <a:ext uri="{FF2B5EF4-FFF2-40B4-BE49-F238E27FC236}">
-                <a16:creationId xmlns:a16="http://schemas.microsoft.com/office/drawing/2014/main" id="{230EBF59-9254-F4D4-2797-E329FD22CA14}"/>
+                <a16:creationId xmlns:a16="http://schemas.microsoft.com/office/drawing/2014/main" id="{08D25D59-4329-E7EB-12E0-951C08BEFD78}"/>
               </a:ext>
             </a:extLst>
           </p:cNvPr>
@@ -397,7 +404,7 @@
           <p:cNvPr id="3" name="Marcador de texto vertical 2">
             <a:extLst>
               <a:ext uri="{FF2B5EF4-FFF2-40B4-BE49-F238E27FC236}">
-                <a16:creationId xmlns:a16="http://schemas.microsoft.com/office/drawing/2014/main" id="{08B0054A-3E8F-D233-F1AB-9C35F3F1C94B}"/>
+                <a16:creationId xmlns:a16="http://schemas.microsoft.com/office/drawing/2014/main" id="{E6CAEF0C-CF95-B282-5D58-2E4DB1FC8202}"/>
               </a:ext>
             </a:extLst>
           </p:cNvPr>
@@ -455,7 +462,7 @@
           <p:cNvPr id="4" name="Marcador de fecha 3">
             <a:extLst>
               <a:ext uri="{FF2B5EF4-FFF2-40B4-BE49-F238E27FC236}">
-                <a16:creationId xmlns:a16="http://schemas.microsoft.com/office/drawing/2014/main" id="{022A8E04-6704-B776-D32F-D7F1F5E39586}"/>
+                <a16:creationId xmlns:a16="http://schemas.microsoft.com/office/drawing/2014/main" id="{ACFD28BC-9A6D-811F-1429-C247F051D07E}"/>
               </a:ext>
             </a:extLst>
           </p:cNvPr>
@@ -471,7 +478,7 @@
           <a:bodyPr/>
           <a:lstStyle/>
           <a:p>
-            <a:fld id="{60E86B95-B350-4559-83F9-9817161F6D3A}" type="datetimeFigureOut">
+            <a:fld id="{306FF930-1B1D-4D9D-94F7-484F0D0B4167}" type="datetimeFigureOut">
               <a:rPr lang="es-AR" smtClean="0"/>
               <a:t>23/6/2026</a:t>
             </a:fld>
@@ -484,7 +491,7 @@
           <p:cNvPr id="5" name="Marcador de pie de página 4">
             <a:extLst>
               <a:ext uri="{FF2B5EF4-FFF2-40B4-BE49-F238E27FC236}">
-                <a16:creationId xmlns:a16="http://schemas.microsoft.com/office/drawing/2014/main" id="{1FCD3B94-6622-4E53-E97F-17ADEC6D6519}"/>
+                <a16:creationId xmlns:a16="http://schemas.microsoft.com/office/drawing/2014/main" id="{4A90F503-9E4C-FC45-88F7-9E4769EEEF02}"/>
               </a:ext>
             </a:extLst>
           </p:cNvPr>
@@ -509,7 +516,7 @@
           <p:cNvPr id="6" name="Marcador de número de diapositiva 5">
             <a:extLst>
               <a:ext uri="{FF2B5EF4-FFF2-40B4-BE49-F238E27FC236}">
-                <a16:creationId xmlns:a16="http://schemas.microsoft.com/office/drawing/2014/main" id="{D538E3F3-6F38-D4DE-D71B-1B1EFDB54384}"/>
+                <a16:creationId xmlns:a16="http://schemas.microsoft.com/office/drawing/2014/main" id="{B1FC5459-6AF5-0E10-77C9-CB34CB576156}"/>
               </a:ext>
             </a:extLst>
           </p:cNvPr>
@@ -525,7 +532,7 @@
           <a:bodyPr/>
           <a:lstStyle/>
           <a:p>
-            <a:fld id="{C1F0B0F2-A878-43E8-A094-1791F671B38B}" type="slidenum">
+            <a:fld id="{5E747B70-7BF8-4839-B134-BDC359C860DC}" type="slidenum">
               <a:rPr lang="es-AR" smtClean="0"/>
               <a:t>‹Nº›</a:t>
             </a:fld>
@@ -536,7 +543,7 @@
     </p:spTree>
     <p:extLst>
       <p:ext uri="{BB962C8B-B14F-4D97-AF65-F5344CB8AC3E}">
-        <p14:creationId xmlns:p14="http://schemas.microsoft.com/office/powerpoint/2010/main" val="1470979116"/>
+        <p14:creationId xmlns:p14="http://schemas.microsoft.com/office/powerpoint/2010/main" val="3963381914"/>
       </p:ext>
     </p:extLst>
   </p:cSld>
@@ -568,7 +575,7 @@
           <p:cNvPr id="2" name="Título vertical 1">
             <a:extLst>
               <a:ext uri="{FF2B5EF4-FFF2-40B4-BE49-F238E27FC236}">
-                <a16:creationId xmlns:a16="http://schemas.microsoft.com/office/drawing/2014/main" id="{26931E46-508E-E1C7-F987-2D24D4459905}"/>
+                <a16:creationId xmlns:a16="http://schemas.microsoft.com/office/drawing/2014/main" id="{D361519B-94F5-5394-BBB9-3B1396264FA3}"/>
               </a:ext>
             </a:extLst>
           </p:cNvPr>
@@ -602,7 +609,7 @@
           <p:cNvPr id="3" name="Marcador de texto vertical 2">
             <a:extLst>
               <a:ext uri="{FF2B5EF4-FFF2-40B4-BE49-F238E27FC236}">
-                <a16:creationId xmlns:a16="http://schemas.microsoft.com/office/drawing/2014/main" id="{3BA2E060-790B-626F-A873-B9D01505E285}"/>
+                <a16:creationId xmlns:a16="http://schemas.microsoft.com/office/drawing/2014/main" id="{D54D84DC-3C0A-5551-EB6A-AFFB99790E76}"/>
               </a:ext>
             </a:extLst>
           </p:cNvPr>
@@ -665,7 +672,7 @@
           <p:cNvPr id="4" name="Marcador de fecha 3">
             <a:extLst>
               <a:ext uri="{FF2B5EF4-FFF2-40B4-BE49-F238E27FC236}">
-                <a16:creationId xmlns:a16="http://schemas.microsoft.com/office/drawing/2014/main" id="{65682EA9-C949-F9DD-C9B3-FCCD0C2FBCE3}"/>
+                <a16:creationId xmlns:a16="http://schemas.microsoft.com/office/drawing/2014/main" id="{02B4AA6B-70E3-67CF-3D42-7629A3CA2580}"/>
               </a:ext>
             </a:extLst>
           </p:cNvPr>
@@ -681,7 +688,7 @@
           <a:bodyPr/>
           <a:lstStyle/>
           <a:p>
-            <a:fld id="{60E86B95-B350-4559-83F9-9817161F6D3A}" type="datetimeFigureOut">
+            <a:fld id="{306FF930-1B1D-4D9D-94F7-484F0D0B4167}" type="datetimeFigureOut">
               <a:rPr lang="es-AR" smtClean="0"/>
               <a:t>23/6/2026</a:t>
             </a:fld>
@@ -694,7 +701,7 @@
           <p:cNvPr id="5" name="Marcador de pie de página 4">
             <a:extLst>
               <a:ext uri="{FF2B5EF4-FFF2-40B4-BE49-F238E27FC236}">
-                <a16:creationId xmlns:a16="http://schemas.microsoft.com/office/drawing/2014/main" id="{D04AA816-6A29-35E3-2EF0-F9BCF0217BDC}"/>
+                <a16:creationId xmlns:a16="http://schemas.microsoft.com/office/drawing/2014/main" id="{B2E72E63-4B49-ADE1-A6BF-CBE09AC6D19D}"/>
               </a:ext>
             </a:extLst>
           </p:cNvPr>
@@ -719,7 +726,7 @@
           <p:cNvPr id="6" name="Marcador de número de diapositiva 5">
             <a:extLst>
               <a:ext uri="{FF2B5EF4-FFF2-40B4-BE49-F238E27FC236}">
-                <a16:creationId xmlns:a16="http://schemas.microsoft.com/office/drawing/2014/main" id="{60E60A1E-22BD-B817-74C6-643E651935BC}"/>
+                <a16:creationId xmlns:a16="http://schemas.microsoft.com/office/drawing/2014/main" id="{D59DC8CE-E0E6-C3DB-B313-885EB28557BA}"/>
               </a:ext>
             </a:extLst>
           </p:cNvPr>
@@ -735,7 +742,7 @@
           <a:bodyPr/>
           <a:lstStyle/>
           <a:p>
-            <a:fld id="{C1F0B0F2-A878-43E8-A094-1791F671B38B}" type="slidenum">
+            <a:fld id="{5E747B70-7BF8-4839-B134-BDC359C860DC}" type="slidenum">
               <a:rPr lang="es-AR" smtClean="0"/>
               <a:t>‹Nº›</a:t>
             </a:fld>
@@ -746,7 +753,7 @@
     </p:spTree>
     <p:extLst>
       <p:ext uri="{BB962C8B-B14F-4D97-AF65-F5344CB8AC3E}">
-        <p14:creationId xmlns:p14="http://schemas.microsoft.com/office/powerpoint/2010/main" val="4249644363"/>
+        <p14:creationId xmlns:p14="http://schemas.microsoft.com/office/powerpoint/2010/main" val="1515242441"/>
       </p:ext>
     </p:extLst>
   </p:cSld>
@@ -778,7 +785,7 @@
           <p:cNvPr id="2" name="Título 1">
             <a:extLst>
               <a:ext uri="{FF2B5EF4-FFF2-40B4-BE49-F238E27FC236}">
-                <a16:creationId xmlns:a16="http://schemas.microsoft.com/office/drawing/2014/main" id="{B9165705-FC97-B789-2C98-D7166A5CB7C9}"/>
+                <a16:creationId xmlns:a16="http://schemas.microsoft.com/office/drawing/2014/main" id="{0830A733-2CC1-E9C4-0FE6-D1503A7E5DFD}"/>
               </a:ext>
             </a:extLst>
           </p:cNvPr>
@@ -807,7 +814,7 @@
           <p:cNvPr id="3" name="Marcador de contenido 2">
             <a:extLst>
               <a:ext uri="{FF2B5EF4-FFF2-40B4-BE49-F238E27FC236}">
-                <a16:creationId xmlns:a16="http://schemas.microsoft.com/office/drawing/2014/main" id="{82C31844-167E-DF5F-170D-498C9DFFA346}"/>
+                <a16:creationId xmlns:a16="http://schemas.microsoft.com/office/drawing/2014/main" id="{BCEBEE01-F7AD-8A19-F41B-1EF5447DAFAD}"/>
               </a:ext>
             </a:extLst>
           </p:cNvPr>
@@ -865,7 +872,7 @@
           <p:cNvPr id="4" name="Marcador de fecha 3">
             <a:extLst>
               <a:ext uri="{FF2B5EF4-FFF2-40B4-BE49-F238E27FC236}">
-                <a16:creationId xmlns:a16="http://schemas.microsoft.com/office/drawing/2014/main" id="{67659000-FC12-9295-EC03-0CB1A9BC75B6}"/>
+                <a16:creationId xmlns:a16="http://schemas.microsoft.com/office/drawing/2014/main" id="{AD250AB0-E0A8-0DB5-2138-8AD1F9949C33}"/>
               </a:ext>
             </a:extLst>
           </p:cNvPr>
@@ -881,7 +888,7 @@
           <a:bodyPr/>
           <a:lstStyle/>
           <a:p>
-            <a:fld id="{60E86B95-B350-4559-83F9-9817161F6D3A}" type="datetimeFigureOut">
+            <a:fld id="{306FF930-1B1D-4D9D-94F7-484F0D0B4167}" type="datetimeFigureOut">
               <a:rPr lang="es-AR" smtClean="0"/>
               <a:t>23/6/2026</a:t>
             </a:fld>
@@ -894,7 +901,7 @@
           <p:cNvPr id="5" name="Marcador de pie de página 4">
             <a:extLst>
               <a:ext uri="{FF2B5EF4-FFF2-40B4-BE49-F238E27FC236}">
-                <a16:creationId xmlns:a16="http://schemas.microsoft.com/office/drawing/2014/main" id="{4D24A253-2D0A-976F-081C-628F3A0ED4C1}"/>
+                <a16:creationId xmlns:a16="http://schemas.microsoft.com/office/drawing/2014/main" id="{A9BF9BB5-C796-985E-E85A-0EDED635F1DB}"/>
               </a:ext>
             </a:extLst>
           </p:cNvPr>
@@ -919,7 +926,7 @@
           <p:cNvPr id="6" name="Marcador de número de diapositiva 5">
             <a:extLst>
               <a:ext uri="{FF2B5EF4-FFF2-40B4-BE49-F238E27FC236}">
-                <a16:creationId xmlns:a16="http://schemas.microsoft.com/office/drawing/2014/main" id="{3399E0D8-9BDB-3EFF-BF93-2C4AAB432300}"/>
+                <a16:creationId xmlns:a16="http://schemas.microsoft.com/office/drawing/2014/main" id="{7F003ED5-9E79-D6DB-3DD6-5525F85976CA}"/>
               </a:ext>
             </a:extLst>
           </p:cNvPr>
@@ -935,7 +942,7 @@
           <a:bodyPr/>
           <a:lstStyle/>
           <a:p>
-            <a:fld id="{C1F0B0F2-A878-43E8-A094-1791F671B38B}" type="slidenum">
+            <a:fld id="{5E747B70-7BF8-4839-B134-BDC359C860DC}" type="slidenum">
               <a:rPr lang="es-AR" smtClean="0"/>
               <a:t>‹Nº›</a:t>
             </a:fld>
@@ -946,7 +953,7 @@
     </p:spTree>
     <p:extLst>
       <p:ext uri="{BB962C8B-B14F-4D97-AF65-F5344CB8AC3E}">
-        <p14:creationId xmlns:p14="http://schemas.microsoft.com/office/powerpoint/2010/main" val="395033308"/>
+        <p14:creationId xmlns:p14="http://schemas.microsoft.com/office/powerpoint/2010/main" val="536656474"/>
       </p:ext>
     </p:extLst>
   </p:cSld>
@@ -978,7 +985,7 @@
           <p:cNvPr id="2" name="Título 1">
             <a:extLst>
               <a:ext uri="{FF2B5EF4-FFF2-40B4-BE49-F238E27FC236}">
-                <a16:creationId xmlns:a16="http://schemas.microsoft.com/office/drawing/2014/main" id="{439B10DC-23D1-7CCE-B324-FA8416F824D2}"/>
+                <a16:creationId xmlns:a16="http://schemas.microsoft.com/office/drawing/2014/main" id="{2A719B86-6887-3BBA-5CCA-562596982A09}"/>
               </a:ext>
             </a:extLst>
           </p:cNvPr>
@@ -1016,7 +1023,7 @@
           <p:cNvPr id="3" name="Marcador de texto 2">
             <a:extLst>
               <a:ext uri="{FF2B5EF4-FFF2-40B4-BE49-F238E27FC236}">
-                <a16:creationId xmlns:a16="http://schemas.microsoft.com/office/drawing/2014/main" id="{CD171B4F-C4F1-6125-B36E-486A6A4713AF}"/>
+                <a16:creationId xmlns:a16="http://schemas.microsoft.com/office/drawing/2014/main" id="{B4957586-8706-CA82-AA79-4B0495150253}"/>
               </a:ext>
             </a:extLst>
           </p:cNvPr>
@@ -1141,7 +1148,7 @@
           <p:cNvPr id="4" name="Marcador de fecha 3">
             <a:extLst>
               <a:ext uri="{FF2B5EF4-FFF2-40B4-BE49-F238E27FC236}">
-                <a16:creationId xmlns:a16="http://schemas.microsoft.com/office/drawing/2014/main" id="{1A0F1748-26AC-6CF1-F7E3-E50F727F5E3A}"/>
+                <a16:creationId xmlns:a16="http://schemas.microsoft.com/office/drawing/2014/main" id="{9F1A347A-A966-50D5-BC39-BC865AB5B0F4}"/>
               </a:ext>
             </a:extLst>
           </p:cNvPr>
@@ -1157,7 +1164,7 @@
           <a:bodyPr/>
           <a:lstStyle/>
           <a:p>
-            <a:fld id="{60E86B95-B350-4559-83F9-9817161F6D3A}" type="datetimeFigureOut">
+            <a:fld id="{306FF930-1B1D-4D9D-94F7-484F0D0B4167}" type="datetimeFigureOut">
               <a:rPr lang="es-AR" smtClean="0"/>
               <a:t>23/6/2026</a:t>
             </a:fld>
@@ -1170,7 +1177,7 @@
           <p:cNvPr id="5" name="Marcador de pie de página 4">
             <a:extLst>
               <a:ext uri="{FF2B5EF4-FFF2-40B4-BE49-F238E27FC236}">
-                <a16:creationId xmlns:a16="http://schemas.microsoft.com/office/drawing/2014/main" id="{709FB7B2-853A-4705-6248-78A9AEABF143}"/>
+                <a16:creationId xmlns:a16="http://schemas.microsoft.com/office/drawing/2014/main" id="{C081E5B9-B233-F0C0-32A4-5B532A87546C}"/>
               </a:ext>
             </a:extLst>
           </p:cNvPr>
@@ -1195,7 +1202,7 @@
           <p:cNvPr id="6" name="Marcador de número de diapositiva 5">
             <a:extLst>
               <a:ext uri="{FF2B5EF4-FFF2-40B4-BE49-F238E27FC236}">
-                <a16:creationId xmlns:a16="http://schemas.microsoft.com/office/drawing/2014/main" id="{26ADB92E-D28B-3E82-53F8-429943472751}"/>
+                <a16:creationId xmlns:a16="http://schemas.microsoft.com/office/drawing/2014/main" id="{32A47F6A-9046-EC32-2FC4-16B1607F62FD}"/>
               </a:ext>
             </a:extLst>
           </p:cNvPr>
@@ -1211,7 +1218,7 @@
           <a:bodyPr/>
           <a:lstStyle/>
           <a:p>
-            <a:fld id="{C1F0B0F2-A878-43E8-A094-1791F671B38B}" type="slidenum">
+            <a:fld id="{5E747B70-7BF8-4839-B134-BDC359C860DC}" type="slidenum">
               <a:rPr lang="es-AR" smtClean="0"/>
               <a:t>‹Nº›</a:t>
             </a:fld>
@@ -1222,7 +1229,7 @@
     </p:spTree>
     <p:extLst>
       <p:ext uri="{BB962C8B-B14F-4D97-AF65-F5344CB8AC3E}">
-        <p14:creationId xmlns:p14="http://schemas.microsoft.com/office/powerpoint/2010/main" val="2557168093"/>
+        <p14:creationId xmlns:p14="http://schemas.microsoft.com/office/powerpoint/2010/main" val="1928329260"/>
       </p:ext>
     </p:extLst>
   </p:cSld>
@@ -1254,7 +1261,7 @@
           <p:cNvPr id="2" name="Título 1">
             <a:extLst>
               <a:ext uri="{FF2B5EF4-FFF2-40B4-BE49-F238E27FC236}">
-                <a16:creationId xmlns:a16="http://schemas.microsoft.com/office/drawing/2014/main" id="{12F50B35-8E0B-23D7-A80F-AEB4FB2BB8EE}"/>
+                <a16:creationId xmlns:a16="http://schemas.microsoft.com/office/drawing/2014/main" id="{FB968007-55C0-EF0C-7BF2-6EBD71199A7D}"/>
               </a:ext>
             </a:extLst>
           </p:cNvPr>
@@ -1283,7 +1290,7 @@
           <p:cNvPr id="3" name="Marcador de contenido 2">
             <a:extLst>
               <a:ext uri="{FF2B5EF4-FFF2-40B4-BE49-F238E27FC236}">
-                <a16:creationId xmlns:a16="http://schemas.microsoft.com/office/drawing/2014/main" id="{30425CDD-75DA-153F-29F4-F11F4C3FE037}"/>
+                <a16:creationId xmlns:a16="http://schemas.microsoft.com/office/drawing/2014/main" id="{C5590296-B2E4-F171-1C90-55DD98D164C4}"/>
               </a:ext>
             </a:extLst>
           </p:cNvPr>
@@ -1346,7 +1353,7 @@
           <p:cNvPr id="4" name="Marcador de contenido 3">
             <a:extLst>
               <a:ext uri="{FF2B5EF4-FFF2-40B4-BE49-F238E27FC236}">
-                <a16:creationId xmlns:a16="http://schemas.microsoft.com/office/drawing/2014/main" id="{36F93E92-1855-F0A5-7CFE-C015FF201648}"/>
+                <a16:creationId xmlns:a16="http://schemas.microsoft.com/office/drawing/2014/main" id="{D161BD5C-1E4D-236F-0DC0-3AB17826857B}"/>
               </a:ext>
             </a:extLst>
           </p:cNvPr>
@@ -1409,7 +1416,7 @@
           <p:cNvPr id="5" name="Marcador de fecha 4">
             <a:extLst>
               <a:ext uri="{FF2B5EF4-FFF2-40B4-BE49-F238E27FC236}">
-                <a16:creationId xmlns:a16="http://schemas.microsoft.com/office/drawing/2014/main" id="{3BB10911-7477-8D66-51AB-0EF794A7F2E5}"/>
+                <a16:creationId xmlns:a16="http://schemas.microsoft.com/office/drawing/2014/main" id="{94135C7C-C3E1-179F-FB74-0175748B0076}"/>
               </a:ext>
             </a:extLst>
           </p:cNvPr>
@@ -1425,7 +1432,7 @@
           <a:bodyPr/>
           <a:lstStyle/>
           <a:p>
-            <a:fld id="{60E86B95-B350-4559-83F9-9817161F6D3A}" type="datetimeFigureOut">
+            <a:fld id="{306FF930-1B1D-4D9D-94F7-484F0D0B4167}" type="datetimeFigureOut">
               <a:rPr lang="es-AR" smtClean="0"/>
               <a:t>23/6/2026</a:t>
             </a:fld>
@@ -1438,7 +1445,7 @@
           <p:cNvPr id="6" name="Marcador de pie de página 5">
             <a:extLst>
               <a:ext uri="{FF2B5EF4-FFF2-40B4-BE49-F238E27FC236}">
-                <a16:creationId xmlns:a16="http://schemas.microsoft.com/office/drawing/2014/main" id="{03F44A94-C3D3-B5BB-0158-941F6304425A}"/>
+                <a16:creationId xmlns:a16="http://schemas.microsoft.com/office/drawing/2014/main" id="{E6D56032-2999-227A-EEA5-65BD361B5EAD}"/>
               </a:ext>
             </a:extLst>
           </p:cNvPr>
@@ -1463,7 +1470,7 @@
           <p:cNvPr id="7" name="Marcador de número de diapositiva 6">
             <a:extLst>
               <a:ext uri="{FF2B5EF4-FFF2-40B4-BE49-F238E27FC236}">
-                <a16:creationId xmlns:a16="http://schemas.microsoft.com/office/drawing/2014/main" id="{9A0AF8D5-A180-8FC1-01A4-54D8FA7AAAEE}"/>
+                <a16:creationId xmlns:a16="http://schemas.microsoft.com/office/drawing/2014/main" id="{03BA7E76-24C8-1B0D-3CB3-2499347FF98A}"/>
               </a:ext>
             </a:extLst>
           </p:cNvPr>
@@ -1479,7 +1486,7 @@
           <a:bodyPr/>
           <a:lstStyle/>
           <a:p>
-            <a:fld id="{C1F0B0F2-A878-43E8-A094-1791F671B38B}" type="slidenum">
+            <a:fld id="{5E747B70-7BF8-4839-B134-BDC359C860DC}" type="slidenum">
               <a:rPr lang="es-AR" smtClean="0"/>
               <a:t>‹Nº›</a:t>
             </a:fld>
@@ -1490,7 +1497,7 @@
     </p:spTree>
     <p:extLst>
       <p:ext uri="{BB962C8B-B14F-4D97-AF65-F5344CB8AC3E}">
-        <p14:creationId xmlns:p14="http://schemas.microsoft.com/office/powerpoint/2010/main" val="3857742234"/>
+        <p14:creationId xmlns:p14="http://schemas.microsoft.com/office/powerpoint/2010/main" val="3972282749"/>
       </p:ext>
     </p:extLst>
   </p:cSld>
@@ -1522,7 +1529,7 @@
           <p:cNvPr id="2" name="Título 1">
             <a:extLst>
               <a:ext uri="{FF2B5EF4-FFF2-40B4-BE49-F238E27FC236}">
-                <a16:creationId xmlns:a16="http://schemas.microsoft.com/office/drawing/2014/main" id="{7EDBE169-BF2A-25C5-0309-C94E364533EA}"/>
+                <a16:creationId xmlns:a16="http://schemas.microsoft.com/office/drawing/2014/main" id="{B93F19F4-3C2A-CBDC-6EF2-D3E98E22B108}"/>
               </a:ext>
             </a:extLst>
           </p:cNvPr>
@@ -1556,7 +1563,7 @@
           <p:cNvPr id="3" name="Marcador de texto 2">
             <a:extLst>
               <a:ext uri="{FF2B5EF4-FFF2-40B4-BE49-F238E27FC236}">
-                <a16:creationId xmlns:a16="http://schemas.microsoft.com/office/drawing/2014/main" id="{1A350798-9E14-E907-A3B4-24E804C5B9D5}"/>
+                <a16:creationId xmlns:a16="http://schemas.microsoft.com/office/drawing/2014/main" id="{B789898C-1515-F835-6D92-9CD383045DAB}"/>
               </a:ext>
             </a:extLst>
           </p:cNvPr>
@@ -1627,7 +1634,7 @@
           <p:cNvPr id="4" name="Marcador de contenido 3">
             <a:extLst>
               <a:ext uri="{FF2B5EF4-FFF2-40B4-BE49-F238E27FC236}">
-                <a16:creationId xmlns:a16="http://schemas.microsoft.com/office/drawing/2014/main" id="{F281549C-B209-F945-7CC0-DDCA7F9118F4}"/>
+                <a16:creationId xmlns:a16="http://schemas.microsoft.com/office/drawing/2014/main" id="{A934EAE2-93A9-DD6A-7631-04913EFD6009}"/>
               </a:ext>
             </a:extLst>
           </p:cNvPr>
@@ -1690,7 +1697,7 @@
           <p:cNvPr id="5" name="Marcador de texto 4">
             <a:extLst>
               <a:ext uri="{FF2B5EF4-FFF2-40B4-BE49-F238E27FC236}">
-                <a16:creationId xmlns:a16="http://schemas.microsoft.com/office/drawing/2014/main" id="{C0535416-D435-3AEE-ED94-8C867FB355F9}"/>
+                <a16:creationId xmlns:a16="http://schemas.microsoft.com/office/drawing/2014/main" id="{394AC488-131E-1504-1F09-361E32B6C81A}"/>
               </a:ext>
             </a:extLst>
           </p:cNvPr>
@@ -1761,7 +1768,7 @@
           <p:cNvPr id="6" name="Marcador de contenido 5">
             <a:extLst>
               <a:ext uri="{FF2B5EF4-FFF2-40B4-BE49-F238E27FC236}">
-                <a16:creationId xmlns:a16="http://schemas.microsoft.com/office/drawing/2014/main" id="{3EB78B50-DD0F-CE1F-B420-1118BDA14CB6}"/>
+                <a16:creationId xmlns:a16="http://schemas.microsoft.com/office/drawing/2014/main" id="{EF55B2DA-8C18-3171-8D63-D1A2E4A3B8BC}"/>
               </a:ext>
             </a:extLst>
           </p:cNvPr>
@@ -1824,7 +1831,7 @@
           <p:cNvPr id="7" name="Marcador de fecha 6">
             <a:extLst>
               <a:ext uri="{FF2B5EF4-FFF2-40B4-BE49-F238E27FC236}">
-                <a16:creationId xmlns:a16="http://schemas.microsoft.com/office/drawing/2014/main" id="{ABC78A3A-EEF7-3A94-415B-4C9FAA4BE3AE}"/>
+                <a16:creationId xmlns:a16="http://schemas.microsoft.com/office/drawing/2014/main" id="{CBA59FFC-5151-80B0-D617-8B2A56349561}"/>
               </a:ext>
             </a:extLst>
           </p:cNvPr>
@@ -1840,7 +1847,7 @@
           <a:bodyPr/>
           <a:lstStyle/>
           <a:p>
-            <a:fld id="{60E86B95-B350-4559-83F9-9817161F6D3A}" type="datetimeFigureOut">
+            <a:fld id="{306FF930-1B1D-4D9D-94F7-484F0D0B4167}" type="datetimeFigureOut">
               <a:rPr lang="es-AR" smtClean="0"/>
               <a:t>23/6/2026</a:t>
             </a:fld>
@@ -1853,7 +1860,7 @@
           <p:cNvPr id="8" name="Marcador de pie de página 7">
             <a:extLst>
               <a:ext uri="{FF2B5EF4-FFF2-40B4-BE49-F238E27FC236}">
-                <a16:creationId xmlns:a16="http://schemas.microsoft.com/office/drawing/2014/main" id="{9F9B24E0-1576-C4A0-9A94-38D0DB4092DE}"/>
+                <a16:creationId xmlns:a16="http://schemas.microsoft.com/office/drawing/2014/main" id="{1581DD15-4F72-FD3B-4FE9-29AD332E3E16}"/>
               </a:ext>
             </a:extLst>
           </p:cNvPr>
@@ -1878,7 +1885,7 @@
           <p:cNvPr id="9" name="Marcador de número de diapositiva 8">
             <a:extLst>
               <a:ext uri="{FF2B5EF4-FFF2-40B4-BE49-F238E27FC236}">
-                <a16:creationId xmlns:a16="http://schemas.microsoft.com/office/drawing/2014/main" id="{3DA571C6-BE76-D74D-BD9C-C7A57C5C7FE7}"/>
+                <a16:creationId xmlns:a16="http://schemas.microsoft.com/office/drawing/2014/main" id="{29C20389-3070-E018-2F3F-3F452740FC25}"/>
               </a:ext>
             </a:extLst>
           </p:cNvPr>
@@ -1894,7 +1901,7 @@
           <a:bodyPr/>
           <a:lstStyle/>
           <a:p>
-            <a:fld id="{C1F0B0F2-A878-43E8-A094-1791F671B38B}" type="slidenum">
+            <a:fld id="{5E747B70-7BF8-4839-B134-BDC359C860DC}" type="slidenum">
               <a:rPr lang="es-AR" smtClean="0"/>
               <a:t>‹Nº›</a:t>
             </a:fld>
@@ -1905,7 +1912,7 @@
     </p:spTree>
     <p:extLst>
       <p:ext uri="{BB962C8B-B14F-4D97-AF65-F5344CB8AC3E}">
-        <p14:creationId xmlns:p14="http://schemas.microsoft.com/office/powerpoint/2010/main" val="826493982"/>
+        <p14:creationId xmlns:p14="http://schemas.microsoft.com/office/powerpoint/2010/main" val="2999633766"/>
       </p:ext>
     </p:extLst>
   </p:cSld>
@@ -1937,7 +1944,7 @@
           <p:cNvPr id="2" name="Título 1">
             <a:extLst>
               <a:ext uri="{FF2B5EF4-FFF2-40B4-BE49-F238E27FC236}">
-                <a16:creationId xmlns:a16="http://schemas.microsoft.com/office/drawing/2014/main" id="{DB51E4AB-2B94-DE0B-A877-875A5B2EE59E}"/>
+                <a16:creationId xmlns:a16="http://schemas.microsoft.com/office/drawing/2014/main" id="{EBDFD8E6-E501-0DD4-53C9-14FD43F3C51E}"/>
               </a:ext>
             </a:extLst>
           </p:cNvPr>
@@ -1966,7 +1973,7 @@
           <p:cNvPr id="3" name="Marcador de fecha 2">
             <a:extLst>
               <a:ext uri="{FF2B5EF4-FFF2-40B4-BE49-F238E27FC236}">
-                <a16:creationId xmlns:a16="http://schemas.microsoft.com/office/drawing/2014/main" id="{71FA13FF-0FFD-43EF-47D6-ED32E732BB16}"/>
+                <a16:creationId xmlns:a16="http://schemas.microsoft.com/office/drawing/2014/main" id="{B5BA56E5-1EFA-83F9-5D1E-C3C19DC3024F}"/>
               </a:ext>
             </a:extLst>
           </p:cNvPr>
@@ -1982,7 +1989,7 @@
           <a:bodyPr/>
           <a:lstStyle/>
           <a:p>
-            <a:fld id="{60E86B95-B350-4559-83F9-9817161F6D3A}" type="datetimeFigureOut">
+            <a:fld id="{306FF930-1B1D-4D9D-94F7-484F0D0B4167}" type="datetimeFigureOut">
               <a:rPr lang="es-AR" smtClean="0"/>
               <a:t>23/6/2026</a:t>
             </a:fld>
@@ -1995,7 +2002,7 @@
           <p:cNvPr id="4" name="Marcador de pie de página 3">
             <a:extLst>
               <a:ext uri="{FF2B5EF4-FFF2-40B4-BE49-F238E27FC236}">
-                <a16:creationId xmlns:a16="http://schemas.microsoft.com/office/drawing/2014/main" id="{91F7AD1B-5CA0-421D-37DA-5060F1A84F59}"/>
+                <a16:creationId xmlns:a16="http://schemas.microsoft.com/office/drawing/2014/main" id="{D05E33DE-63A4-0850-911D-81C17475FDF9}"/>
               </a:ext>
             </a:extLst>
           </p:cNvPr>
@@ -2020,7 +2027,7 @@
           <p:cNvPr id="5" name="Marcador de número de diapositiva 4">
             <a:extLst>
               <a:ext uri="{FF2B5EF4-FFF2-40B4-BE49-F238E27FC236}">
-                <a16:creationId xmlns:a16="http://schemas.microsoft.com/office/drawing/2014/main" id="{073AAE6B-659E-DA8E-0E52-84BCA30D56C3}"/>
+                <a16:creationId xmlns:a16="http://schemas.microsoft.com/office/drawing/2014/main" id="{F6FE7BF8-030E-7E48-E020-0F1D5E78B328}"/>
               </a:ext>
             </a:extLst>
           </p:cNvPr>
@@ -2036,7 +2043,7 @@
           <a:bodyPr/>
           <a:lstStyle/>
           <a:p>
-            <a:fld id="{C1F0B0F2-A878-43E8-A094-1791F671B38B}" type="slidenum">
+            <a:fld id="{5E747B70-7BF8-4839-B134-BDC359C860DC}" type="slidenum">
               <a:rPr lang="es-AR" smtClean="0"/>
               <a:t>‹Nº›</a:t>
             </a:fld>
@@ -2047,7 +2054,7 @@
     </p:spTree>
     <p:extLst>
       <p:ext uri="{BB962C8B-B14F-4D97-AF65-F5344CB8AC3E}">
-        <p14:creationId xmlns:p14="http://schemas.microsoft.com/office/powerpoint/2010/main" val="2025586895"/>
+        <p14:creationId xmlns:p14="http://schemas.microsoft.com/office/powerpoint/2010/main" val="3077908047"/>
       </p:ext>
     </p:extLst>
   </p:cSld>
@@ -2079,7 +2086,7 @@
           <p:cNvPr id="2" name="Marcador de fecha 1">
             <a:extLst>
               <a:ext uri="{FF2B5EF4-FFF2-40B4-BE49-F238E27FC236}">
-                <a16:creationId xmlns:a16="http://schemas.microsoft.com/office/drawing/2014/main" id="{183DB1CE-F264-3A64-6B1D-1F7EC44D6110}"/>
+                <a16:creationId xmlns:a16="http://schemas.microsoft.com/office/drawing/2014/main" id="{85DD1C74-C201-B9E9-8EF1-22B3E03912CA}"/>
               </a:ext>
             </a:extLst>
           </p:cNvPr>
@@ -2095,7 +2102,7 @@
           <a:bodyPr/>
           <a:lstStyle/>
           <a:p>
-            <a:fld id="{60E86B95-B350-4559-83F9-9817161F6D3A}" type="datetimeFigureOut">
+            <a:fld id="{306FF930-1B1D-4D9D-94F7-484F0D0B4167}" type="datetimeFigureOut">
               <a:rPr lang="es-AR" smtClean="0"/>
               <a:t>23/6/2026</a:t>
             </a:fld>
@@ -2108,7 +2115,7 @@
           <p:cNvPr id="3" name="Marcador de pie de página 2">
             <a:extLst>
               <a:ext uri="{FF2B5EF4-FFF2-40B4-BE49-F238E27FC236}">
-                <a16:creationId xmlns:a16="http://schemas.microsoft.com/office/drawing/2014/main" id="{61B65D05-E836-712A-31CF-6565E42A1E03}"/>
+                <a16:creationId xmlns:a16="http://schemas.microsoft.com/office/drawing/2014/main" id="{83D00FB0-F835-D1A1-741A-922488A691E0}"/>
               </a:ext>
             </a:extLst>
           </p:cNvPr>
@@ -2133,7 +2140,7 @@
           <p:cNvPr id="4" name="Marcador de número de diapositiva 3">
             <a:extLst>
               <a:ext uri="{FF2B5EF4-FFF2-40B4-BE49-F238E27FC236}">
-                <a16:creationId xmlns:a16="http://schemas.microsoft.com/office/drawing/2014/main" id="{26F90B71-A9CB-82F9-884B-F0858A5C211D}"/>
+                <a16:creationId xmlns:a16="http://schemas.microsoft.com/office/drawing/2014/main" id="{4F8B9556-60B6-E66A-CDF3-E86BB2A318D6}"/>
               </a:ext>
             </a:extLst>
           </p:cNvPr>
@@ -2149,7 +2156,7 @@
           <a:bodyPr/>
           <a:lstStyle/>
           <a:p>
-            <a:fld id="{C1F0B0F2-A878-43E8-A094-1791F671B38B}" type="slidenum">
+            <a:fld id="{5E747B70-7BF8-4839-B134-BDC359C860DC}" type="slidenum">
               <a:rPr lang="es-AR" smtClean="0"/>
               <a:t>‹Nº›</a:t>
             </a:fld>
@@ -2160,7 +2167,7 @@
     </p:spTree>
     <p:extLst>
       <p:ext uri="{BB962C8B-B14F-4D97-AF65-F5344CB8AC3E}">
-        <p14:creationId xmlns:p14="http://schemas.microsoft.com/office/powerpoint/2010/main" val="1270801877"/>
+        <p14:creationId xmlns:p14="http://schemas.microsoft.com/office/powerpoint/2010/main" val="3813037531"/>
       </p:ext>
     </p:extLst>
   </p:cSld>
@@ -2192,7 +2199,7 @@
           <p:cNvPr id="2" name="Título 1">
             <a:extLst>
               <a:ext uri="{FF2B5EF4-FFF2-40B4-BE49-F238E27FC236}">
-                <a16:creationId xmlns:a16="http://schemas.microsoft.com/office/drawing/2014/main" id="{EEA0220E-8490-3696-8D43-F5EEB1CA8F9A}"/>
+                <a16:creationId xmlns:a16="http://schemas.microsoft.com/office/drawing/2014/main" id="{209635B0-16D8-42AE-F31A-8366D3E0C6A8}"/>
               </a:ext>
             </a:extLst>
           </p:cNvPr>
@@ -2230,7 +2237,7 @@
           <p:cNvPr id="3" name="Marcador de contenido 2">
             <a:extLst>
               <a:ext uri="{FF2B5EF4-FFF2-40B4-BE49-F238E27FC236}">
-                <a16:creationId xmlns:a16="http://schemas.microsoft.com/office/drawing/2014/main" id="{CC7E0E17-A47F-D495-D962-6BF134889132}"/>
+                <a16:creationId xmlns:a16="http://schemas.microsoft.com/office/drawing/2014/main" id="{DE8D41CA-9E35-115E-855A-D3D774A10C97}"/>
               </a:ext>
             </a:extLst>
           </p:cNvPr>
@@ -2321,7 +2328,7 @@
           <p:cNvPr id="4" name="Marcador de texto 3">
             <a:extLst>
               <a:ext uri="{FF2B5EF4-FFF2-40B4-BE49-F238E27FC236}">
-                <a16:creationId xmlns:a16="http://schemas.microsoft.com/office/drawing/2014/main" id="{98FF0C02-F459-920D-68E0-642979FCAAB5}"/>
+                <a16:creationId xmlns:a16="http://schemas.microsoft.com/office/drawing/2014/main" id="{2841ABDD-2E96-E355-D54E-B15E4E19D858}"/>
               </a:ext>
             </a:extLst>
           </p:cNvPr>
@@ -2392,7 +2399,7 @@
           <p:cNvPr id="5" name="Marcador de fecha 4">
             <a:extLst>
               <a:ext uri="{FF2B5EF4-FFF2-40B4-BE49-F238E27FC236}">
-                <a16:creationId xmlns:a16="http://schemas.microsoft.com/office/drawing/2014/main" id="{73EB6999-7C32-D7BC-4B85-C54645FDC47E}"/>
+                <a16:creationId xmlns:a16="http://schemas.microsoft.com/office/drawing/2014/main" id="{79810807-E1E3-0AD3-9CE8-17FE7F8AD7E3}"/>
               </a:ext>
             </a:extLst>
           </p:cNvPr>
@@ -2408,7 +2415,7 @@
           <a:bodyPr/>
           <a:lstStyle/>
           <a:p>
-            <a:fld id="{60E86B95-B350-4559-83F9-9817161F6D3A}" type="datetimeFigureOut">
+            <a:fld id="{306FF930-1B1D-4D9D-94F7-484F0D0B4167}" type="datetimeFigureOut">
               <a:rPr lang="es-AR" smtClean="0"/>
               <a:t>23/6/2026</a:t>
             </a:fld>
@@ -2421,7 +2428,7 @@
           <p:cNvPr id="6" name="Marcador de pie de página 5">
             <a:extLst>
               <a:ext uri="{FF2B5EF4-FFF2-40B4-BE49-F238E27FC236}">
-                <a16:creationId xmlns:a16="http://schemas.microsoft.com/office/drawing/2014/main" id="{859C080E-DDC9-1EE6-B5A0-9F4616F1AD32}"/>
+                <a16:creationId xmlns:a16="http://schemas.microsoft.com/office/drawing/2014/main" id="{4253EACD-A473-7924-915B-C419F8BFE09F}"/>
               </a:ext>
             </a:extLst>
           </p:cNvPr>
@@ -2446,7 +2453,7 @@
           <p:cNvPr id="7" name="Marcador de número de diapositiva 6">
             <a:extLst>
               <a:ext uri="{FF2B5EF4-FFF2-40B4-BE49-F238E27FC236}">
-                <a16:creationId xmlns:a16="http://schemas.microsoft.com/office/drawing/2014/main" id="{7C7621FD-72AC-5953-5605-DB7F45247BA2}"/>
+                <a16:creationId xmlns:a16="http://schemas.microsoft.com/office/drawing/2014/main" id="{5F4EAD63-F5B6-BCE4-3324-D6EC392A58F1}"/>
               </a:ext>
             </a:extLst>
           </p:cNvPr>
@@ -2462,7 +2469,7 @@
           <a:bodyPr/>
           <a:lstStyle/>
           <a:p>
-            <a:fld id="{C1F0B0F2-A878-43E8-A094-1791F671B38B}" type="slidenum">
+            <a:fld id="{5E747B70-7BF8-4839-B134-BDC359C860DC}" type="slidenum">
               <a:rPr lang="es-AR" smtClean="0"/>
               <a:t>‹Nº›</a:t>
             </a:fld>
@@ -2473,7 +2480,7 @@
     </p:spTree>
     <p:extLst>
       <p:ext uri="{BB962C8B-B14F-4D97-AF65-F5344CB8AC3E}">
-        <p14:creationId xmlns:p14="http://schemas.microsoft.com/office/powerpoint/2010/main" val="1847005393"/>
+        <p14:creationId xmlns:p14="http://schemas.microsoft.com/office/powerpoint/2010/main" val="1100724667"/>
       </p:ext>
     </p:extLst>
   </p:cSld>
@@ -2505,7 +2512,7 @@
           <p:cNvPr id="2" name="Título 1">
             <a:extLst>
               <a:ext uri="{FF2B5EF4-FFF2-40B4-BE49-F238E27FC236}">
-                <a16:creationId xmlns:a16="http://schemas.microsoft.com/office/drawing/2014/main" id="{ED1F9BFD-9045-99AE-05E7-3B3D37F8190E}"/>
+                <a16:creationId xmlns:a16="http://schemas.microsoft.com/office/drawing/2014/main" id="{134AA87E-25F7-C11E-31C2-E205FDD9C0DE}"/>
               </a:ext>
             </a:extLst>
           </p:cNvPr>
@@ -2543,7 +2550,7 @@
           <p:cNvPr id="3" name="Marcador de posición de imagen 2">
             <a:extLst>
               <a:ext uri="{FF2B5EF4-FFF2-40B4-BE49-F238E27FC236}">
-                <a16:creationId xmlns:a16="http://schemas.microsoft.com/office/drawing/2014/main" id="{7AD4A1EB-990B-BE93-5593-AAA991E4AC94}"/>
+                <a16:creationId xmlns:a16="http://schemas.microsoft.com/office/drawing/2014/main" id="{4D764943-3D50-FE1D-651E-1A9D71446959}"/>
               </a:ext>
             </a:extLst>
           </p:cNvPr>
@@ -2610,7 +2617,7 @@
           <p:cNvPr id="4" name="Marcador de texto 3">
             <a:extLst>
               <a:ext uri="{FF2B5EF4-FFF2-40B4-BE49-F238E27FC236}">
-                <a16:creationId xmlns:a16="http://schemas.microsoft.com/office/drawing/2014/main" id="{66BE3E68-48F9-B131-94A2-7BC3AD862F26}"/>
+                <a16:creationId xmlns:a16="http://schemas.microsoft.com/office/drawing/2014/main" id="{3AE64E36-89B3-C279-7B92-179BF4663085}"/>
               </a:ext>
             </a:extLst>
           </p:cNvPr>
@@ -2681,7 +2688,7 @@
           <p:cNvPr id="5" name="Marcador de fecha 4">
             <a:extLst>
               <a:ext uri="{FF2B5EF4-FFF2-40B4-BE49-F238E27FC236}">
-                <a16:creationId xmlns:a16="http://schemas.microsoft.com/office/drawing/2014/main" id="{71C1BC91-C615-7331-99B8-3E59E7BEA803}"/>
+                <a16:creationId xmlns:a16="http://schemas.microsoft.com/office/drawing/2014/main" id="{89881EF0-884F-C29D-8BAD-D16D1776EB4E}"/>
               </a:ext>
             </a:extLst>
           </p:cNvPr>
@@ -2697,7 +2704,7 @@
           <a:bodyPr/>
           <a:lstStyle/>
           <a:p>
-            <a:fld id="{60E86B95-B350-4559-83F9-9817161F6D3A}" type="datetimeFigureOut">
+            <a:fld id="{306FF930-1B1D-4D9D-94F7-484F0D0B4167}" type="datetimeFigureOut">
               <a:rPr lang="es-AR" smtClean="0"/>
               <a:t>23/6/2026</a:t>
             </a:fld>
@@ -2710,7 +2717,7 @@
           <p:cNvPr id="6" name="Marcador de pie de página 5">
             <a:extLst>
               <a:ext uri="{FF2B5EF4-FFF2-40B4-BE49-F238E27FC236}">
-                <a16:creationId xmlns:a16="http://schemas.microsoft.com/office/drawing/2014/main" id="{6D2C82B7-87BE-7A73-8214-E549C76203B3}"/>
+                <a16:creationId xmlns:a16="http://schemas.microsoft.com/office/drawing/2014/main" id="{863FFD8F-C5C9-E6AF-36C2-B24A70C1EE92}"/>
               </a:ext>
             </a:extLst>
           </p:cNvPr>
@@ -2735,7 +2742,7 @@
           <p:cNvPr id="7" name="Marcador de número de diapositiva 6">
             <a:extLst>
               <a:ext uri="{FF2B5EF4-FFF2-40B4-BE49-F238E27FC236}">
-                <a16:creationId xmlns:a16="http://schemas.microsoft.com/office/drawing/2014/main" id="{D3129286-0F62-734C-B9CB-8DED9C0A3EF2}"/>
+                <a16:creationId xmlns:a16="http://schemas.microsoft.com/office/drawing/2014/main" id="{BC4C8F3E-DAF4-C0CA-79A8-268AF1115389}"/>
               </a:ext>
             </a:extLst>
           </p:cNvPr>
@@ -2751,7 +2758,7 @@
           <a:bodyPr/>
           <a:lstStyle/>
           <a:p>
-            <a:fld id="{C1F0B0F2-A878-43E8-A094-1791F671B38B}" type="slidenum">
+            <a:fld id="{5E747B70-7BF8-4839-B134-BDC359C860DC}" type="slidenum">
               <a:rPr lang="es-AR" smtClean="0"/>
               <a:t>‹Nº›</a:t>
             </a:fld>
@@ -2762,7 +2769,7 @@
     </p:spTree>
     <p:extLst>
       <p:ext uri="{BB962C8B-B14F-4D97-AF65-F5344CB8AC3E}">
-        <p14:creationId xmlns:p14="http://schemas.microsoft.com/office/powerpoint/2010/main" val="2606843460"/>
+        <p14:creationId xmlns:p14="http://schemas.microsoft.com/office/powerpoint/2010/main" val="1528403772"/>
       </p:ext>
     </p:extLst>
   </p:cSld>
@@ -2799,7 +2806,7 @@
           <p:cNvPr id="2" name="Marcador de título 1">
             <a:extLst>
               <a:ext uri="{FF2B5EF4-FFF2-40B4-BE49-F238E27FC236}">
-                <a16:creationId xmlns:a16="http://schemas.microsoft.com/office/drawing/2014/main" id="{9E67A72F-2D01-B775-9236-D9E8A94888AD}"/>
+                <a16:creationId xmlns:a16="http://schemas.microsoft.com/office/drawing/2014/main" id="{2FA8A0EF-0D84-6157-9A77-70135C6F1252}"/>
               </a:ext>
             </a:extLst>
           </p:cNvPr>
@@ -2838,7 +2845,7 @@
           <p:cNvPr id="3" name="Marcador de texto 2">
             <a:extLst>
               <a:ext uri="{FF2B5EF4-FFF2-40B4-BE49-F238E27FC236}">
-                <a16:creationId xmlns:a16="http://schemas.microsoft.com/office/drawing/2014/main" id="{CBBB0B4F-FF4F-81C0-D566-AF2F0B1FEAC0}"/>
+                <a16:creationId xmlns:a16="http://schemas.microsoft.com/office/drawing/2014/main" id="{F464C9F9-C5F2-5AF5-A654-4742DD1FB9BF}"/>
               </a:ext>
             </a:extLst>
           </p:cNvPr>
@@ -2906,7 +2913,7 @@
           <p:cNvPr id="4" name="Marcador de fecha 3">
             <a:extLst>
               <a:ext uri="{FF2B5EF4-FFF2-40B4-BE49-F238E27FC236}">
-                <a16:creationId xmlns:a16="http://schemas.microsoft.com/office/drawing/2014/main" id="{15238475-6F54-58A5-5C8E-6E784EABA34E}"/>
+                <a16:creationId xmlns:a16="http://schemas.microsoft.com/office/drawing/2014/main" id="{760D7495-582C-DA82-E9C2-54C91450FB20}"/>
               </a:ext>
             </a:extLst>
           </p:cNvPr>
@@ -2940,7 +2947,7 @@
             </a:lvl1pPr>
           </a:lstStyle>
           <a:p>
-            <a:fld id="{60E86B95-B350-4559-83F9-9817161F6D3A}" type="datetimeFigureOut">
+            <a:fld id="{306FF930-1B1D-4D9D-94F7-484F0D0B4167}" type="datetimeFigureOut">
               <a:rPr lang="es-AR" smtClean="0"/>
               <a:t>23/6/2026</a:t>
             </a:fld>
@@ -2953,7 +2960,7 @@
           <p:cNvPr id="5" name="Marcador de pie de página 4">
             <a:extLst>
               <a:ext uri="{FF2B5EF4-FFF2-40B4-BE49-F238E27FC236}">
-                <a16:creationId xmlns:a16="http://schemas.microsoft.com/office/drawing/2014/main" id="{948569BE-A632-5369-9F19-8A1754694946}"/>
+                <a16:creationId xmlns:a16="http://schemas.microsoft.com/office/drawing/2014/main" id="{136CEA0F-5AA2-33A8-A94F-6B1E09D8C72A}"/>
               </a:ext>
             </a:extLst>
           </p:cNvPr>
@@ -2996,7 +3003,7 @@
           <p:cNvPr id="6" name="Marcador de número de diapositiva 5">
             <a:extLst>
               <a:ext uri="{FF2B5EF4-FFF2-40B4-BE49-F238E27FC236}">
-                <a16:creationId xmlns:a16="http://schemas.microsoft.com/office/drawing/2014/main" id="{1AB17FDB-C0D5-5766-3350-FC3BAF701C5F}"/>
+                <a16:creationId xmlns:a16="http://schemas.microsoft.com/office/drawing/2014/main" id="{D6A90C82-93A2-0DEF-1895-894FCDF99D71}"/>
               </a:ext>
             </a:extLst>
           </p:cNvPr>
@@ -3030,7 +3037,7 @@
             </a:lvl1pPr>
           </a:lstStyle>
           <a:p>
-            <a:fld id="{C1F0B0F2-A878-43E8-A094-1791F671B38B}" type="slidenum">
+            <a:fld id="{5E747B70-7BF8-4839-B134-BDC359C860DC}" type="slidenum">
               <a:rPr lang="es-AR" smtClean="0"/>
               <a:t>‹Nº›</a:t>
             </a:fld>
@@ -3041,7 +3048,7 @@
     </p:spTree>
     <p:extLst>
       <p:ext uri="{BB962C8B-B14F-4D97-AF65-F5344CB8AC3E}">
-        <p14:creationId xmlns:p14="http://schemas.microsoft.com/office/powerpoint/2010/main" val="1334054679"/>
+        <p14:creationId xmlns:p14="http://schemas.microsoft.com/office/powerpoint/2010/main" val="1932192948"/>
       </p:ext>
     </p:extLst>
   </p:cSld>
@@ -3361,10 +3368,76 @@
       </p:grpSpPr>
       <p:pic>
         <p:nvPicPr>
-          <p:cNvPr id="5" name="Imagen 4">
-            <a:extLst>
-              <a:ext uri="{FF2B5EF4-FFF2-40B4-BE49-F238E27FC236}">
-                <a16:creationId xmlns:a16="http://schemas.microsoft.com/office/drawing/2014/main" id="{8A6A2D10-C589-0763-6875-7EBB6FB237AD}"/>
+          <p:cNvPr id="7" name="Imagen 6">
+            <a:extLst>
+              <a:ext uri="{FF2B5EF4-FFF2-40B4-BE49-F238E27FC236}">
+                <a16:creationId xmlns:a16="http://schemas.microsoft.com/office/drawing/2014/main" id="{86809B7B-7994-C2F9-2454-25509F723FE3}"/>
+              </a:ext>
+            </a:extLst>
+          </p:cNvPr>
+          <p:cNvPicPr>
+            <a:picLocks noChangeAspect="1"/>
+          </p:cNvPicPr>
+          <p:nvPr/>
+        </p:nvPicPr>
+        <p:blipFill>
+          <a:blip r:embed="rId2"/>
+          <a:stretch>
+            <a:fillRect/>
+          </a:stretch>
+        </p:blipFill>
+        <p:spPr>
+          <a:xfrm>
+            <a:off x="0" y="0"/>
+            <a:ext cx="12192000" cy="6786880"/>
+          </a:xfrm>
+          <a:prstGeom prst="rect">
+            <a:avLst/>
+          </a:prstGeom>
+        </p:spPr>
+      </p:pic>
+    </p:spTree>
+    <p:extLst>
+      <p:ext uri="{BB962C8B-B14F-4D97-AF65-F5344CB8AC3E}">
+        <p14:creationId xmlns:p14="http://schemas.microsoft.com/office/powerpoint/2010/main" val="1171227534"/>
+      </p:ext>
+    </p:extLst>
+  </p:cSld>
+  <p:clrMapOvr>
+    <a:masterClrMapping/>
+  </p:clrMapOvr>
+</p:sld>
+</file>
+
+<file path=ppt/slides/slide10.xml><?xml version="1.0" encoding="utf-8"?>
+<p:sld xmlns:a="http://schemas.openxmlformats.org/drawingml/2006/main" xmlns:r="http://schemas.openxmlformats.org/officeDocument/2006/relationships" xmlns:p="http://schemas.openxmlformats.org/presentationml/2006/main">
+  <p:cSld>
+    <p:spTree>
+      <p:nvGrpSpPr>
+        <p:cNvPr id="1" name="">
+          <a:extLst>
+            <a:ext uri="{FF2B5EF4-FFF2-40B4-BE49-F238E27FC236}">
+              <a16:creationId xmlns:a16="http://schemas.microsoft.com/office/drawing/2014/main" id="{7C29125E-EF22-B0FB-EC1C-611DF9C262B3}"/>
+            </a:ext>
+          </a:extLst>
+        </p:cNvPr>
+        <p:cNvGrpSpPr/>
+        <p:nvPr/>
+      </p:nvGrpSpPr>
+      <p:grpSpPr>
+        <a:xfrm>
+          <a:off x="0" y="0"/>
+          <a:ext cx="0" cy="0"/>
+          <a:chOff x="0" y="0"/>
+          <a:chExt cx="0" cy="0"/>
+        </a:xfrm>
+      </p:grpSpPr>
+      <p:pic>
+        <p:nvPicPr>
+          <p:cNvPr id="3" name="Imagen 2">
+            <a:extLst>
+              <a:ext uri="{FF2B5EF4-FFF2-40B4-BE49-F238E27FC236}">
+                <a16:creationId xmlns:a16="http://schemas.microsoft.com/office/drawing/2014/main" id="{CA88DB13-AB86-0353-0DDB-29B62B1BA7F7}"/>
               </a:ext>
             </a:extLst>
           </p:cNvPr>
@@ -3392,7 +3465,7 @@
     </p:spTree>
     <p:extLst>
       <p:ext uri="{BB962C8B-B14F-4D97-AF65-F5344CB8AC3E}">
-        <p14:creationId xmlns:p14="http://schemas.microsoft.com/office/powerpoint/2010/main" val="2915427742"/>
+        <p14:creationId xmlns:p14="http://schemas.microsoft.com/office/powerpoint/2010/main" val="2943224096"/>
       </p:ext>
     </p:extLst>
   </p:cSld>
@@ -3402,7 +3475,7 @@
 </p:sld>
 </file>
 
-<file path=ppt/slides/slide10.xml><?xml version="1.0" encoding="utf-8"?>
+<file path=ppt/slides/slide11.xml><?xml version="1.0" encoding="utf-8"?>
 <p:sld xmlns:a="http://schemas.openxmlformats.org/drawingml/2006/main" xmlns:r="http://schemas.openxmlformats.org/officeDocument/2006/relationships" xmlns:p="http://schemas.openxmlformats.org/presentationml/2006/main">
   <p:cSld>
     <p:spTree>
@@ -3410,7 +3483,7 @@
         <p:cNvPr id="1" name="">
           <a:extLst>
             <a:ext uri="{FF2B5EF4-FFF2-40B4-BE49-F238E27FC236}">
-              <a16:creationId xmlns:a16="http://schemas.microsoft.com/office/drawing/2014/main" id="{E3507019-491A-1ABB-857D-DAB77F87180C}"/>
+              <a16:creationId xmlns:a16="http://schemas.microsoft.com/office/drawing/2014/main" id="{ABE1AC16-E673-69A5-4C30-98A99CA6F8B5}"/>
             </a:ext>
           </a:extLst>
         </p:cNvPr>
@@ -3430,7 +3503,7 @@
           <p:cNvPr id="3" name="Imagen 2">
             <a:extLst>
               <a:ext uri="{FF2B5EF4-FFF2-40B4-BE49-F238E27FC236}">
-                <a16:creationId xmlns:a16="http://schemas.microsoft.com/office/drawing/2014/main" id="{C083CACC-B016-DD49-6C24-53D325D22A32}"/>
+                <a16:creationId xmlns:a16="http://schemas.microsoft.com/office/drawing/2014/main" id="{36DAB948-A191-F17F-EF2F-FF319347325F}"/>
               </a:ext>
             </a:extLst>
           </p:cNvPr>
@@ -3458,7 +3531,7 @@
     </p:spTree>
     <p:extLst>
       <p:ext uri="{BB962C8B-B14F-4D97-AF65-F5344CB8AC3E}">
-        <p14:creationId xmlns:p14="http://schemas.microsoft.com/office/powerpoint/2010/main" val="1868843544"/>
+        <p14:creationId xmlns:p14="http://schemas.microsoft.com/office/powerpoint/2010/main" val="3685781223"/>
       </p:ext>
     </p:extLst>
   </p:cSld>
@@ -3468,7 +3541,7 @@
 </p:sld>
 </file>
 
-<file path=ppt/slides/slide11.xml><?xml version="1.0" encoding="utf-8"?>
+<file path=ppt/slides/slide12.xml><?xml version="1.0" encoding="utf-8"?>
 <p:sld xmlns:a="http://schemas.openxmlformats.org/drawingml/2006/main" xmlns:r="http://schemas.openxmlformats.org/officeDocument/2006/relationships" xmlns:p="http://schemas.openxmlformats.org/presentationml/2006/main">
   <p:cSld>
     <p:spTree>
@@ -3476,7 +3549,7 @@
         <p:cNvPr id="1" name="">
           <a:extLst>
             <a:ext uri="{FF2B5EF4-FFF2-40B4-BE49-F238E27FC236}">
-              <a16:creationId xmlns:a16="http://schemas.microsoft.com/office/drawing/2014/main" id="{A0B9FD8C-ECAC-29D7-EA37-98F2FCBEEA20}"/>
+              <a16:creationId xmlns:a16="http://schemas.microsoft.com/office/drawing/2014/main" id="{902C8269-CC30-9304-FBEA-4771907C8017}"/>
             </a:ext>
           </a:extLst>
         </p:cNvPr>
@@ -3496,7 +3569,7 @@
           <p:cNvPr id="3" name="Imagen 2">
             <a:extLst>
               <a:ext uri="{FF2B5EF4-FFF2-40B4-BE49-F238E27FC236}">
-                <a16:creationId xmlns:a16="http://schemas.microsoft.com/office/drawing/2014/main" id="{E2702800-6115-53CD-56A1-2AF92667EF03}"/>
+                <a16:creationId xmlns:a16="http://schemas.microsoft.com/office/drawing/2014/main" id="{3EA2B614-C583-9D75-647B-015043DDA9BA}"/>
               </a:ext>
             </a:extLst>
           </p:cNvPr>
@@ -3513,8 +3586,8 @@
         </p:blipFill>
         <p:spPr>
           <a:xfrm>
-            <a:off x="0" y="-1"/>
-            <a:ext cx="12192000" cy="6943411"/>
+            <a:off x="0" y="0"/>
+            <a:ext cx="12191999" cy="6858000"/>
           </a:xfrm>
           <a:prstGeom prst="rect">
             <a:avLst/>
@@ -3524,7 +3597,7 @@
     </p:spTree>
     <p:extLst>
       <p:ext uri="{BB962C8B-B14F-4D97-AF65-F5344CB8AC3E}">
-        <p14:creationId xmlns:p14="http://schemas.microsoft.com/office/powerpoint/2010/main" val="1348067243"/>
+        <p14:creationId xmlns:p14="http://schemas.microsoft.com/office/powerpoint/2010/main" val="2831057327"/>
       </p:ext>
     </p:extLst>
   </p:cSld>
@@ -3534,7 +3607,7 @@
 </p:sld>
 </file>
 
-<file path=ppt/slides/slide12.xml><?xml version="1.0" encoding="utf-8"?>
+<file path=ppt/slides/slide13.xml><?xml version="1.0" encoding="utf-8"?>
 <p:sld xmlns:a="http://schemas.openxmlformats.org/drawingml/2006/main" xmlns:r="http://schemas.openxmlformats.org/officeDocument/2006/relationships" xmlns:p="http://schemas.openxmlformats.org/presentationml/2006/main">
   <p:cSld>
     <p:spTree>
@@ -3542,7 +3615,7 @@
         <p:cNvPr id="1" name="">
           <a:extLst>
             <a:ext uri="{FF2B5EF4-FFF2-40B4-BE49-F238E27FC236}">
-              <a16:creationId xmlns:a16="http://schemas.microsoft.com/office/drawing/2014/main" id="{B96279E9-F3B6-EF16-47C9-433EA49613B7}"/>
+              <a16:creationId xmlns:a16="http://schemas.microsoft.com/office/drawing/2014/main" id="{821F6439-E4FB-F6C9-3AC8-6A0D54EAF6F3}"/>
             </a:ext>
           </a:extLst>
         </p:cNvPr>
@@ -3562,205 +3635,7 @@
           <p:cNvPr id="3" name="Imagen 2">
             <a:extLst>
               <a:ext uri="{FF2B5EF4-FFF2-40B4-BE49-F238E27FC236}">
-                <a16:creationId xmlns:a16="http://schemas.microsoft.com/office/drawing/2014/main" id="{7FA486AE-1412-1A16-418D-CB1EC1667CAD}"/>
-              </a:ext>
-            </a:extLst>
-          </p:cNvPr>
-          <p:cNvPicPr>
-            <a:picLocks noChangeAspect="1"/>
-          </p:cNvPicPr>
-          <p:nvPr/>
-        </p:nvPicPr>
-        <p:blipFill>
-          <a:blip r:embed="rId2"/>
-          <a:stretch>
-            <a:fillRect/>
-          </a:stretch>
-        </p:blipFill>
-        <p:spPr>
-          <a:xfrm>
-            <a:off x="1" y="0"/>
-            <a:ext cx="12192000" cy="6858000"/>
-          </a:xfrm>
-          <a:prstGeom prst="rect">
-            <a:avLst/>
-          </a:prstGeom>
-        </p:spPr>
-      </p:pic>
-    </p:spTree>
-    <p:extLst>
-      <p:ext uri="{BB962C8B-B14F-4D97-AF65-F5344CB8AC3E}">
-        <p14:creationId xmlns:p14="http://schemas.microsoft.com/office/powerpoint/2010/main" val="1810355497"/>
-      </p:ext>
-    </p:extLst>
-  </p:cSld>
-  <p:clrMapOvr>
-    <a:masterClrMapping/>
-  </p:clrMapOvr>
-</p:sld>
-</file>
-
-<file path=ppt/slides/slide13.xml><?xml version="1.0" encoding="utf-8"?>
-<p:sld xmlns:a="http://schemas.openxmlformats.org/drawingml/2006/main" xmlns:r="http://schemas.openxmlformats.org/officeDocument/2006/relationships" xmlns:p="http://schemas.openxmlformats.org/presentationml/2006/main">
-  <p:cSld>
-    <p:spTree>
-      <p:nvGrpSpPr>
-        <p:cNvPr id="1" name="">
-          <a:extLst>
-            <a:ext uri="{FF2B5EF4-FFF2-40B4-BE49-F238E27FC236}">
-              <a16:creationId xmlns:a16="http://schemas.microsoft.com/office/drawing/2014/main" id="{971F8C8A-521E-6573-6AD3-2F244BA5BC39}"/>
-            </a:ext>
-          </a:extLst>
-        </p:cNvPr>
-        <p:cNvGrpSpPr/>
-        <p:nvPr/>
-      </p:nvGrpSpPr>
-      <p:grpSpPr>
-        <a:xfrm>
-          <a:off x="0" y="0"/>
-          <a:ext cx="0" cy="0"/>
-          <a:chOff x="0" y="0"/>
-          <a:chExt cx="0" cy="0"/>
-        </a:xfrm>
-      </p:grpSpPr>
-      <p:pic>
-        <p:nvPicPr>
-          <p:cNvPr id="3" name="Imagen 2">
-            <a:extLst>
-              <a:ext uri="{FF2B5EF4-FFF2-40B4-BE49-F238E27FC236}">
-                <a16:creationId xmlns:a16="http://schemas.microsoft.com/office/drawing/2014/main" id="{969F5D90-D6D2-A80C-AC57-9B82B0BBCEE9}"/>
-              </a:ext>
-            </a:extLst>
-          </p:cNvPr>
-          <p:cNvPicPr>
-            <a:picLocks noChangeAspect="1"/>
-          </p:cNvPicPr>
-          <p:nvPr/>
-        </p:nvPicPr>
-        <p:blipFill>
-          <a:blip r:embed="rId2"/>
-          <a:stretch>
-            <a:fillRect/>
-          </a:stretch>
-        </p:blipFill>
-        <p:spPr>
-          <a:xfrm>
-            <a:off x="0" y="-1"/>
-            <a:ext cx="12192000" cy="6858001"/>
-          </a:xfrm>
-          <a:prstGeom prst="rect">
-            <a:avLst/>
-          </a:prstGeom>
-        </p:spPr>
-      </p:pic>
-    </p:spTree>
-    <p:extLst>
-      <p:ext uri="{BB962C8B-B14F-4D97-AF65-F5344CB8AC3E}">
-        <p14:creationId xmlns:p14="http://schemas.microsoft.com/office/powerpoint/2010/main" val="3399267142"/>
-      </p:ext>
-    </p:extLst>
-  </p:cSld>
-  <p:clrMapOvr>
-    <a:masterClrMapping/>
-  </p:clrMapOvr>
-</p:sld>
-</file>
-
-<file path=ppt/slides/slide14.xml><?xml version="1.0" encoding="utf-8"?>
-<p:sld xmlns:a="http://schemas.openxmlformats.org/drawingml/2006/main" xmlns:r="http://schemas.openxmlformats.org/officeDocument/2006/relationships" xmlns:p="http://schemas.openxmlformats.org/presentationml/2006/main">
-  <p:cSld>
-    <p:spTree>
-      <p:nvGrpSpPr>
-        <p:cNvPr id="1" name="">
-          <a:extLst>
-            <a:ext uri="{FF2B5EF4-FFF2-40B4-BE49-F238E27FC236}">
-              <a16:creationId xmlns:a16="http://schemas.microsoft.com/office/drawing/2014/main" id="{613F0773-D300-6358-5039-A4DB0CE12EF9}"/>
-            </a:ext>
-          </a:extLst>
-        </p:cNvPr>
-        <p:cNvGrpSpPr/>
-        <p:nvPr/>
-      </p:nvGrpSpPr>
-      <p:grpSpPr>
-        <a:xfrm>
-          <a:off x="0" y="0"/>
-          <a:ext cx="0" cy="0"/>
-          <a:chOff x="0" y="0"/>
-          <a:chExt cx="0" cy="0"/>
-        </a:xfrm>
-      </p:grpSpPr>
-      <p:pic>
-        <p:nvPicPr>
-          <p:cNvPr id="3" name="Imagen 2">
-            <a:extLst>
-              <a:ext uri="{FF2B5EF4-FFF2-40B4-BE49-F238E27FC236}">
-                <a16:creationId xmlns:a16="http://schemas.microsoft.com/office/drawing/2014/main" id="{CBA410A6-EE1D-780C-CA6E-98C984E93C60}"/>
-              </a:ext>
-            </a:extLst>
-          </p:cNvPr>
-          <p:cNvPicPr>
-            <a:picLocks noChangeAspect="1"/>
-          </p:cNvPicPr>
-          <p:nvPr/>
-        </p:nvPicPr>
-        <p:blipFill>
-          <a:blip r:embed="rId2"/>
-          <a:stretch>
-            <a:fillRect/>
-          </a:stretch>
-        </p:blipFill>
-        <p:spPr>
-          <a:xfrm>
-            <a:off x="0" y="-1"/>
-            <a:ext cx="12192000" cy="6858001"/>
-          </a:xfrm>
-          <a:prstGeom prst="rect">
-            <a:avLst/>
-          </a:prstGeom>
-        </p:spPr>
-      </p:pic>
-    </p:spTree>
-    <p:extLst>
-      <p:ext uri="{BB962C8B-B14F-4D97-AF65-F5344CB8AC3E}">
-        <p14:creationId xmlns:p14="http://schemas.microsoft.com/office/powerpoint/2010/main" val="2052443590"/>
-      </p:ext>
-    </p:extLst>
-  </p:cSld>
-  <p:clrMapOvr>
-    <a:masterClrMapping/>
-  </p:clrMapOvr>
-</p:sld>
-</file>
-
-<file path=ppt/slides/slide15.xml><?xml version="1.0" encoding="utf-8"?>
-<p:sld xmlns:a="http://schemas.openxmlformats.org/drawingml/2006/main" xmlns:r="http://schemas.openxmlformats.org/officeDocument/2006/relationships" xmlns:p="http://schemas.openxmlformats.org/presentationml/2006/main">
-  <p:cSld>
-    <p:spTree>
-      <p:nvGrpSpPr>
-        <p:cNvPr id="1" name="">
-          <a:extLst>
-            <a:ext uri="{FF2B5EF4-FFF2-40B4-BE49-F238E27FC236}">
-              <a16:creationId xmlns:a16="http://schemas.microsoft.com/office/drawing/2014/main" id="{008C60A1-B7CE-30FA-6AB2-84AE462C0884}"/>
-            </a:ext>
-          </a:extLst>
-        </p:cNvPr>
-        <p:cNvGrpSpPr/>
-        <p:nvPr/>
-      </p:nvGrpSpPr>
-      <p:grpSpPr>
-        <a:xfrm>
-          <a:off x="0" y="0"/>
-          <a:ext cx="0" cy="0"/>
-          <a:chOff x="0" y="0"/>
-          <a:chExt cx="0" cy="0"/>
-        </a:xfrm>
-      </p:grpSpPr>
-      <p:pic>
-        <p:nvPicPr>
-          <p:cNvPr id="3" name="Imagen 2">
-            <a:extLst>
-              <a:ext uri="{FF2B5EF4-FFF2-40B4-BE49-F238E27FC236}">
-                <a16:creationId xmlns:a16="http://schemas.microsoft.com/office/drawing/2014/main" id="{B119B586-7C1E-1B7E-C44D-1C7CEC7DFB12}"/>
+                <a16:creationId xmlns:a16="http://schemas.microsoft.com/office/drawing/2014/main" id="{369B854A-61F1-9B4A-7448-55E3FE6F044C}"/>
               </a:ext>
             </a:extLst>
           </p:cNvPr>
@@ -3788,7 +3663,7 @@
     </p:spTree>
     <p:extLst>
       <p:ext uri="{BB962C8B-B14F-4D97-AF65-F5344CB8AC3E}">
-        <p14:creationId xmlns:p14="http://schemas.microsoft.com/office/powerpoint/2010/main" val="335650386"/>
+        <p14:creationId xmlns:p14="http://schemas.microsoft.com/office/powerpoint/2010/main" val="3148877407"/>
       </p:ext>
     </p:extLst>
   </p:cSld>
@@ -3798,7 +3673,7 @@
 </p:sld>
 </file>
 
-<file path=ppt/slides/slide16.xml><?xml version="1.0" encoding="utf-8"?>
+<file path=ppt/slides/slide14.xml><?xml version="1.0" encoding="utf-8"?>
 <p:sld xmlns:a="http://schemas.openxmlformats.org/drawingml/2006/main" xmlns:r="http://schemas.openxmlformats.org/officeDocument/2006/relationships" xmlns:p="http://schemas.openxmlformats.org/presentationml/2006/main">
   <p:cSld>
     <p:spTree>
@@ -3806,7 +3681,7 @@
         <p:cNvPr id="1" name="">
           <a:extLst>
             <a:ext uri="{FF2B5EF4-FFF2-40B4-BE49-F238E27FC236}">
-              <a16:creationId xmlns:a16="http://schemas.microsoft.com/office/drawing/2014/main" id="{2767456B-E280-9D9E-58CA-E9280A629D85}"/>
+              <a16:creationId xmlns:a16="http://schemas.microsoft.com/office/drawing/2014/main" id="{FDF6EF8D-6932-7F21-79EB-8B711E93A66F}"/>
             </a:ext>
           </a:extLst>
         </p:cNvPr>
@@ -3826,7 +3701,7 @@
           <p:cNvPr id="3" name="Imagen 2">
             <a:extLst>
               <a:ext uri="{FF2B5EF4-FFF2-40B4-BE49-F238E27FC236}">
-                <a16:creationId xmlns:a16="http://schemas.microsoft.com/office/drawing/2014/main" id="{2E3C6693-1010-A8E9-56F4-564809A7BF5E}"/>
+                <a16:creationId xmlns:a16="http://schemas.microsoft.com/office/drawing/2014/main" id="{02034F11-0FE2-0644-2D28-F5ED28E06297}"/>
               </a:ext>
             </a:extLst>
           </p:cNvPr>
@@ -3854,7 +3729,7 @@
     </p:spTree>
     <p:extLst>
       <p:ext uri="{BB962C8B-B14F-4D97-AF65-F5344CB8AC3E}">
-        <p14:creationId xmlns:p14="http://schemas.microsoft.com/office/powerpoint/2010/main" val="3341646047"/>
+        <p14:creationId xmlns:p14="http://schemas.microsoft.com/office/powerpoint/2010/main" val="343798884"/>
       </p:ext>
     </p:extLst>
   </p:cSld>
@@ -3864,12 +3739,18 @@
 </p:sld>
 </file>
 
-<file path=ppt/slides/slide17.xml><?xml version="1.0" encoding="utf-8"?>
+<file path=ppt/slides/slide15.xml><?xml version="1.0" encoding="utf-8"?>
 <p:sld xmlns:a="http://schemas.openxmlformats.org/drawingml/2006/main" xmlns:r="http://schemas.openxmlformats.org/officeDocument/2006/relationships" xmlns:p="http://schemas.openxmlformats.org/presentationml/2006/main">
   <p:cSld>
     <p:spTree>
       <p:nvGrpSpPr>
-        <p:cNvPr id="1" name=""/>
+        <p:cNvPr id="1" name="">
+          <a:extLst>
+            <a:ext uri="{FF2B5EF4-FFF2-40B4-BE49-F238E27FC236}">
+              <a16:creationId xmlns:a16="http://schemas.microsoft.com/office/drawing/2014/main" id="{911352D3-0A87-ED72-D23B-69756A69E0A3}"/>
+            </a:ext>
+          </a:extLst>
+        </p:cNvPr>
         <p:cNvGrpSpPr/>
         <p:nvPr/>
       </p:nvGrpSpPr>
@@ -3883,10 +3764,10 @@
       </p:grpSpPr>
       <p:pic>
         <p:nvPicPr>
-          <p:cNvPr id="5" name="Imagen 4">
-            <a:extLst>
-              <a:ext uri="{FF2B5EF4-FFF2-40B4-BE49-F238E27FC236}">
-                <a16:creationId xmlns:a16="http://schemas.microsoft.com/office/drawing/2014/main" id="{6036A0A8-EEBE-8B83-4429-895B4DE760CA}"/>
+          <p:cNvPr id="3" name="Imagen 2">
+            <a:extLst>
+              <a:ext uri="{FF2B5EF4-FFF2-40B4-BE49-F238E27FC236}">
+                <a16:creationId xmlns:a16="http://schemas.microsoft.com/office/drawing/2014/main" id="{2828A0E0-6CD8-7948-4383-81C092B52CE9}"/>
               </a:ext>
             </a:extLst>
           </p:cNvPr>
@@ -3914,7 +3795,7 @@
     </p:spTree>
     <p:extLst>
       <p:ext uri="{BB962C8B-B14F-4D97-AF65-F5344CB8AC3E}">
-        <p14:creationId xmlns:p14="http://schemas.microsoft.com/office/powerpoint/2010/main" val="3066247719"/>
+        <p14:creationId xmlns:p14="http://schemas.microsoft.com/office/powerpoint/2010/main" val="2958968717"/>
       </p:ext>
     </p:extLst>
   </p:cSld>
@@ -3924,12 +3805,18 @@
 </p:sld>
 </file>
 
-<file path=ppt/slides/slide18.xml><?xml version="1.0" encoding="utf-8"?>
+<file path=ppt/slides/slide16.xml><?xml version="1.0" encoding="utf-8"?>
 <p:sld xmlns:a="http://schemas.openxmlformats.org/drawingml/2006/main" xmlns:r="http://schemas.openxmlformats.org/officeDocument/2006/relationships" xmlns:p="http://schemas.openxmlformats.org/presentationml/2006/main">
   <p:cSld>
     <p:spTree>
       <p:nvGrpSpPr>
-        <p:cNvPr id="1" name=""/>
+        <p:cNvPr id="1" name="">
+          <a:extLst>
+            <a:ext uri="{FF2B5EF4-FFF2-40B4-BE49-F238E27FC236}">
+              <a16:creationId xmlns:a16="http://schemas.microsoft.com/office/drawing/2014/main" id="{09C3E917-6EB3-6164-0528-A86162A0F0D1}"/>
+            </a:ext>
+          </a:extLst>
+        </p:cNvPr>
         <p:cNvGrpSpPr/>
         <p:nvPr/>
       </p:nvGrpSpPr>
@@ -3943,70 +3830,10 @@
       </p:grpSpPr>
       <p:pic>
         <p:nvPicPr>
-          <p:cNvPr id="5" name="Imagen 4">
-            <a:extLst>
-              <a:ext uri="{FF2B5EF4-FFF2-40B4-BE49-F238E27FC236}">
-                <a16:creationId xmlns:a16="http://schemas.microsoft.com/office/drawing/2014/main" id="{91255C8A-D3F3-BD84-AA11-7DAF8309B6D9}"/>
-              </a:ext>
-            </a:extLst>
-          </p:cNvPr>
-          <p:cNvPicPr>
-            <a:picLocks noChangeAspect="1"/>
-          </p:cNvPicPr>
-          <p:nvPr/>
-        </p:nvPicPr>
-        <p:blipFill>
-          <a:blip r:embed="rId2"/>
-          <a:stretch>
-            <a:fillRect/>
-          </a:stretch>
-        </p:blipFill>
-        <p:spPr>
-          <a:xfrm>
-            <a:off x="0" y="0"/>
-            <a:ext cx="12269037" cy="6858000"/>
-          </a:xfrm>
-          <a:prstGeom prst="rect">
-            <a:avLst/>
-          </a:prstGeom>
-        </p:spPr>
-      </p:pic>
-    </p:spTree>
-    <p:extLst>
-      <p:ext uri="{BB962C8B-B14F-4D97-AF65-F5344CB8AC3E}">
-        <p14:creationId xmlns:p14="http://schemas.microsoft.com/office/powerpoint/2010/main" val="2086970287"/>
-      </p:ext>
-    </p:extLst>
-  </p:cSld>
-  <p:clrMapOvr>
-    <a:masterClrMapping/>
-  </p:clrMapOvr>
-</p:sld>
-</file>
-
-<file path=ppt/slides/slide2.xml><?xml version="1.0" encoding="utf-8"?>
-<p:sld xmlns:a="http://schemas.openxmlformats.org/drawingml/2006/main" xmlns:r="http://schemas.openxmlformats.org/officeDocument/2006/relationships" xmlns:p="http://schemas.openxmlformats.org/presentationml/2006/main">
-  <p:cSld>
-    <p:spTree>
-      <p:nvGrpSpPr>
-        <p:cNvPr id="1" name=""/>
-        <p:cNvGrpSpPr/>
-        <p:nvPr/>
-      </p:nvGrpSpPr>
-      <p:grpSpPr>
-        <a:xfrm>
-          <a:off x="0" y="0"/>
-          <a:ext cx="0" cy="0"/>
-          <a:chOff x="0" y="0"/>
-          <a:chExt cx="0" cy="0"/>
-        </a:xfrm>
-      </p:grpSpPr>
-      <p:pic>
-        <p:nvPicPr>
-          <p:cNvPr id="5" name="Imagen 4">
-            <a:extLst>
-              <a:ext uri="{FF2B5EF4-FFF2-40B4-BE49-F238E27FC236}">
-                <a16:creationId xmlns:a16="http://schemas.microsoft.com/office/drawing/2014/main" id="{46C9923B-73D2-FCFC-3037-FD199717B023}"/>
+          <p:cNvPr id="3" name="Imagen 2">
+            <a:extLst>
+              <a:ext uri="{FF2B5EF4-FFF2-40B4-BE49-F238E27FC236}">
+                <a16:creationId xmlns:a16="http://schemas.microsoft.com/office/drawing/2014/main" id="{CC83E839-0AD6-6650-504F-BAFA3E28F1B3}"/>
               </a:ext>
             </a:extLst>
           </p:cNvPr>
@@ -4034,7 +3861,7 @@
     </p:spTree>
     <p:extLst>
       <p:ext uri="{BB962C8B-B14F-4D97-AF65-F5344CB8AC3E}">
-        <p14:creationId xmlns:p14="http://schemas.microsoft.com/office/powerpoint/2010/main" val="2686216707"/>
+        <p14:creationId xmlns:p14="http://schemas.microsoft.com/office/powerpoint/2010/main" val="1832194514"/>
       </p:ext>
     </p:extLst>
   </p:cSld>
@@ -4044,7 +3871,7 @@
 </p:sld>
 </file>
 
-<file path=ppt/slides/slide3.xml><?xml version="1.0" encoding="utf-8"?>
+<file path=ppt/slides/slide17.xml><?xml version="1.0" encoding="utf-8"?>
 <p:sld xmlns:a="http://schemas.openxmlformats.org/drawingml/2006/main" xmlns:r="http://schemas.openxmlformats.org/officeDocument/2006/relationships" xmlns:p="http://schemas.openxmlformats.org/presentationml/2006/main">
   <p:cSld>
     <p:spTree>
@@ -4052,7 +3879,7 @@
         <p:cNvPr id="1" name="">
           <a:extLst>
             <a:ext uri="{FF2B5EF4-FFF2-40B4-BE49-F238E27FC236}">
-              <a16:creationId xmlns:a16="http://schemas.microsoft.com/office/drawing/2014/main" id="{EE55418C-5257-9CDF-4EAC-54EDC20627CC}"/>
+              <a16:creationId xmlns:a16="http://schemas.microsoft.com/office/drawing/2014/main" id="{49046BA5-FDFD-AA5C-6B96-B7794FF365FE}"/>
             </a:ext>
           </a:extLst>
         </p:cNvPr>
@@ -4072,7 +3899,7 @@
           <p:cNvPr id="3" name="Imagen 2">
             <a:extLst>
               <a:ext uri="{FF2B5EF4-FFF2-40B4-BE49-F238E27FC236}">
-                <a16:creationId xmlns:a16="http://schemas.microsoft.com/office/drawing/2014/main" id="{C5531F05-57DF-1697-4791-3D45FA7EB6B3}"/>
+                <a16:creationId xmlns:a16="http://schemas.microsoft.com/office/drawing/2014/main" id="{05CBC435-AB61-5FCC-917F-924007E8649A}"/>
               </a:ext>
             </a:extLst>
           </p:cNvPr>
@@ -4090,7 +3917,7 @@
         <p:spPr>
           <a:xfrm>
             <a:off x="0" y="0"/>
-            <a:ext cx="12191999" cy="6857999"/>
+            <a:ext cx="12192000" cy="6858000"/>
           </a:xfrm>
           <a:prstGeom prst="rect">
             <a:avLst/>
@@ -4100,7 +3927,7 @@
     </p:spTree>
     <p:extLst>
       <p:ext uri="{BB962C8B-B14F-4D97-AF65-F5344CB8AC3E}">
-        <p14:creationId xmlns:p14="http://schemas.microsoft.com/office/powerpoint/2010/main" val="1815464674"/>
+        <p14:creationId xmlns:p14="http://schemas.microsoft.com/office/powerpoint/2010/main" val="3042578948"/>
       </p:ext>
     </p:extLst>
   </p:cSld>
@@ -4110,7 +3937,7 @@
 </p:sld>
 </file>
 
-<file path=ppt/slides/slide4.xml><?xml version="1.0" encoding="utf-8"?>
+<file path=ppt/slides/slide18.xml><?xml version="1.0" encoding="utf-8"?>
 <p:sld xmlns:a="http://schemas.openxmlformats.org/drawingml/2006/main" xmlns:r="http://schemas.openxmlformats.org/officeDocument/2006/relationships" xmlns:p="http://schemas.openxmlformats.org/presentationml/2006/main">
   <p:cSld>
     <p:spTree>
@@ -4118,7 +3945,7 @@
         <p:cNvPr id="1" name="">
           <a:extLst>
             <a:ext uri="{FF2B5EF4-FFF2-40B4-BE49-F238E27FC236}">
-              <a16:creationId xmlns:a16="http://schemas.microsoft.com/office/drawing/2014/main" id="{911BFB61-06B8-EE4D-A4D5-E5CB813E8E39}"/>
+              <a16:creationId xmlns:a16="http://schemas.microsoft.com/office/drawing/2014/main" id="{25266F6A-942F-B096-F04E-08C79996412D}"/>
             </a:ext>
           </a:extLst>
         </p:cNvPr>
@@ -4138,7 +3965,139 @@
           <p:cNvPr id="3" name="Imagen 2">
             <a:extLst>
               <a:ext uri="{FF2B5EF4-FFF2-40B4-BE49-F238E27FC236}">
-                <a16:creationId xmlns:a16="http://schemas.microsoft.com/office/drawing/2014/main" id="{F2B8257F-0C80-D8AB-A3BD-6B7FA73007D2}"/>
+                <a16:creationId xmlns:a16="http://schemas.microsoft.com/office/drawing/2014/main" id="{3F83D1EC-EC32-D4F1-58D9-1A009B3CA742}"/>
+              </a:ext>
+            </a:extLst>
+          </p:cNvPr>
+          <p:cNvPicPr>
+            <a:picLocks noChangeAspect="1"/>
+          </p:cNvPicPr>
+          <p:nvPr/>
+        </p:nvPicPr>
+        <p:blipFill>
+          <a:blip r:embed="rId2"/>
+          <a:stretch>
+            <a:fillRect/>
+          </a:stretch>
+        </p:blipFill>
+        <p:spPr>
+          <a:xfrm>
+            <a:off x="0" y="0"/>
+            <a:ext cx="12192000" cy="6858000"/>
+          </a:xfrm>
+          <a:prstGeom prst="rect">
+            <a:avLst/>
+          </a:prstGeom>
+        </p:spPr>
+      </p:pic>
+    </p:spTree>
+    <p:extLst>
+      <p:ext uri="{BB962C8B-B14F-4D97-AF65-F5344CB8AC3E}">
+        <p14:creationId xmlns:p14="http://schemas.microsoft.com/office/powerpoint/2010/main" val="106063744"/>
+      </p:ext>
+    </p:extLst>
+  </p:cSld>
+  <p:clrMapOvr>
+    <a:masterClrMapping/>
+  </p:clrMapOvr>
+</p:sld>
+</file>
+
+<file path=ppt/slides/slide19.xml><?xml version="1.0" encoding="utf-8"?>
+<p:sld xmlns:a="http://schemas.openxmlformats.org/drawingml/2006/main" xmlns:r="http://schemas.openxmlformats.org/officeDocument/2006/relationships" xmlns:p="http://schemas.openxmlformats.org/presentationml/2006/main">
+  <p:cSld>
+    <p:spTree>
+      <p:nvGrpSpPr>
+        <p:cNvPr id="1" name="">
+          <a:extLst>
+            <a:ext uri="{FF2B5EF4-FFF2-40B4-BE49-F238E27FC236}">
+              <a16:creationId xmlns:a16="http://schemas.microsoft.com/office/drawing/2014/main" id="{96D8C208-E330-2506-79B0-B940F01AD69A}"/>
+            </a:ext>
+          </a:extLst>
+        </p:cNvPr>
+        <p:cNvGrpSpPr/>
+        <p:nvPr/>
+      </p:nvGrpSpPr>
+      <p:grpSpPr>
+        <a:xfrm>
+          <a:off x="0" y="0"/>
+          <a:ext cx="0" cy="0"/>
+          <a:chOff x="0" y="0"/>
+          <a:chExt cx="0" cy="0"/>
+        </a:xfrm>
+      </p:grpSpPr>
+      <p:pic>
+        <p:nvPicPr>
+          <p:cNvPr id="3" name="Imagen 2">
+            <a:extLst>
+              <a:ext uri="{FF2B5EF4-FFF2-40B4-BE49-F238E27FC236}">
+                <a16:creationId xmlns:a16="http://schemas.microsoft.com/office/drawing/2014/main" id="{9B6989F1-BC7F-E480-A2D6-F0BC56344D13}"/>
+              </a:ext>
+            </a:extLst>
+          </p:cNvPr>
+          <p:cNvPicPr>
+            <a:picLocks noChangeAspect="1"/>
+          </p:cNvPicPr>
+          <p:nvPr/>
+        </p:nvPicPr>
+        <p:blipFill>
+          <a:blip r:embed="rId2"/>
+          <a:stretch>
+            <a:fillRect/>
+          </a:stretch>
+        </p:blipFill>
+        <p:spPr>
+          <a:xfrm>
+            <a:off x="0" y="0"/>
+            <a:ext cx="12192000" cy="6858000"/>
+          </a:xfrm>
+          <a:prstGeom prst="rect">
+            <a:avLst/>
+          </a:prstGeom>
+        </p:spPr>
+      </p:pic>
+    </p:spTree>
+    <p:extLst>
+      <p:ext uri="{BB962C8B-B14F-4D97-AF65-F5344CB8AC3E}">
+        <p14:creationId xmlns:p14="http://schemas.microsoft.com/office/powerpoint/2010/main" val="3686680856"/>
+      </p:ext>
+    </p:extLst>
+  </p:cSld>
+  <p:clrMapOvr>
+    <a:masterClrMapping/>
+  </p:clrMapOvr>
+</p:sld>
+</file>
+
+<file path=ppt/slides/slide2.xml><?xml version="1.0" encoding="utf-8"?>
+<p:sld xmlns:a="http://schemas.openxmlformats.org/drawingml/2006/main" xmlns:r="http://schemas.openxmlformats.org/officeDocument/2006/relationships" xmlns:p="http://schemas.openxmlformats.org/presentationml/2006/main">
+  <p:cSld>
+    <p:spTree>
+      <p:nvGrpSpPr>
+        <p:cNvPr id="1" name="">
+          <a:extLst>
+            <a:ext uri="{FF2B5EF4-FFF2-40B4-BE49-F238E27FC236}">
+              <a16:creationId xmlns:a16="http://schemas.microsoft.com/office/drawing/2014/main" id="{899E9E5D-0456-0DB6-4E60-A589E40854C5}"/>
+            </a:ext>
+          </a:extLst>
+        </p:cNvPr>
+        <p:cNvGrpSpPr/>
+        <p:nvPr/>
+      </p:nvGrpSpPr>
+      <p:grpSpPr>
+        <a:xfrm>
+          <a:off x="0" y="0"/>
+          <a:ext cx="0" cy="0"/>
+          <a:chOff x="0" y="0"/>
+          <a:chExt cx="0" cy="0"/>
+        </a:xfrm>
+      </p:grpSpPr>
+      <p:pic>
+        <p:nvPicPr>
+          <p:cNvPr id="3" name="Imagen 2">
+            <a:extLst>
+              <a:ext uri="{FF2B5EF4-FFF2-40B4-BE49-F238E27FC236}">
+                <a16:creationId xmlns:a16="http://schemas.microsoft.com/office/drawing/2014/main" id="{EA5B3FF0-38B8-51CC-F0BF-4B80582FE735}"/>
               </a:ext>
             </a:extLst>
           </p:cNvPr>
@@ -4166,7 +4125,7 @@
     </p:spTree>
     <p:extLst>
       <p:ext uri="{BB962C8B-B14F-4D97-AF65-F5344CB8AC3E}">
-        <p14:creationId xmlns:p14="http://schemas.microsoft.com/office/powerpoint/2010/main" val="98905805"/>
+        <p14:creationId xmlns:p14="http://schemas.microsoft.com/office/powerpoint/2010/main" val="2662152632"/>
       </p:ext>
     </p:extLst>
   </p:cSld>
@@ -4176,7 +4135,7 @@
 </p:sld>
 </file>
 
-<file path=ppt/slides/slide5.xml><?xml version="1.0" encoding="utf-8"?>
+<file path=ppt/slides/slide20.xml><?xml version="1.0" encoding="utf-8"?>
 <p:sld xmlns:a="http://schemas.openxmlformats.org/drawingml/2006/main" xmlns:r="http://schemas.openxmlformats.org/officeDocument/2006/relationships" xmlns:p="http://schemas.openxmlformats.org/presentationml/2006/main">
   <p:cSld>
     <p:spTree>
@@ -4184,7 +4143,7 @@
         <p:cNvPr id="1" name="">
           <a:extLst>
             <a:ext uri="{FF2B5EF4-FFF2-40B4-BE49-F238E27FC236}">
-              <a16:creationId xmlns:a16="http://schemas.microsoft.com/office/drawing/2014/main" id="{345A0D4A-9A39-AA53-07E3-5BB1BA02D13F}"/>
+              <a16:creationId xmlns:a16="http://schemas.microsoft.com/office/drawing/2014/main" id="{1B9125A3-7070-588E-97E1-AF416F90FF64}"/>
             </a:ext>
           </a:extLst>
         </p:cNvPr>
@@ -4204,7 +4163,469 @@
           <p:cNvPr id="3" name="Imagen 2">
             <a:extLst>
               <a:ext uri="{FF2B5EF4-FFF2-40B4-BE49-F238E27FC236}">
-                <a16:creationId xmlns:a16="http://schemas.microsoft.com/office/drawing/2014/main" id="{377A72BC-5322-9CF2-D8CB-5148C8CD2C24}"/>
+                <a16:creationId xmlns:a16="http://schemas.microsoft.com/office/drawing/2014/main" id="{D3881E6A-8A27-1FAD-F6CE-4E8D8B8A2B19}"/>
+              </a:ext>
+            </a:extLst>
+          </p:cNvPr>
+          <p:cNvPicPr>
+            <a:picLocks noChangeAspect="1"/>
+          </p:cNvPicPr>
+          <p:nvPr/>
+        </p:nvPicPr>
+        <p:blipFill>
+          <a:blip r:embed="rId2"/>
+          <a:stretch>
+            <a:fillRect/>
+          </a:stretch>
+        </p:blipFill>
+        <p:spPr>
+          <a:xfrm>
+            <a:off x="0" y="0"/>
+            <a:ext cx="12192000" cy="6858000"/>
+          </a:xfrm>
+          <a:prstGeom prst="rect">
+            <a:avLst/>
+          </a:prstGeom>
+        </p:spPr>
+      </p:pic>
+    </p:spTree>
+    <p:extLst>
+      <p:ext uri="{BB962C8B-B14F-4D97-AF65-F5344CB8AC3E}">
+        <p14:creationId xmlns:p14="http://schemas.microsoft.com/office/powerpoint/2010/main" val="4159073466"/>
+      </p:ext>
+    </p:extLst>
+  </p:cSld>
+  <p:clrMapOvr>
+    <a:masterClrMapping/>
+  </p:clrMapOvr>
+</p:sld>
+</file>
+
+<file path=ppt/slides/slide21.xml><?xml version="1.0" encoding="utf-8"?>
+<p:sld xmlns:a="http://schemas.openxmlformats.org/drawingml/2006/main" xmlns:r="http://schemas.openxmlformats.org/officeDocument/2006/relationships" xmlns:p="http://schemas.openxmlformats.org/presentationml/2006/main">
+  <p:cSld>
+    <p:spTree>
+      <p:nvGrpSpPr>
+        <p:cNvPr id="1" name="">
+          <a:extLst>
+            <a:ext uri="{FF2B5EF4-FFF2-40B4-BE49-F238E27FC236}">
+              <a16:creationId xmlns:a16="http://schemas.microsoft.com/office/drawing/2014/main" id="{65C689E1-7127-2FFD-5BBB-2B5D9F201304}"/>
+            </a:ext>
+          </a:extLst>
+        </p:cNvPr>
+        <p:cNvGrpSpPr/>
+        <p:nvPr/>
+      </p:nvGrpSpPr>
+      <p:grpSpPr>
+        <a:xfrm>
+          <a:off x="0" y="0"/>
+          <a:ext cx="0" cy="0"/>
+          <a:chOff x="0" y="0"/>
+          <a:chExt cx="0" cy="0"/>
+        </a:xfrm>
+      </p:grpSpPr>
+      <p:pic>
+        <p:nvPicPr>
+          <p:cNvPr id="3" name="Imagen 2">
+            <a:extLst>
+              <a:ext uri="{FF2B5EF4-FFF2-40B4-BE49-F238E27FC236}">
+                <a16:creationId xmlns:a16="http://schemas.microsoft.com/office/drawing/2014/main" id="{7CA2BE86-5D9D-6F5D-BD23-059E0ACFA268}"/>
+              </a:ext>
+            </a:extLst>
+          </p:cNvPr>
+          <p:cNvPicPr>
+            <a:picLocks noChangeAspect="1"/>
+          </p:cNvPicPr>
+          <p:nvPr/>
+        </p:nvPicPr>
+        <p:blipFill>
+          <a:blip r:embed="rId2"/>
+          <a:stretch>
+            <a:fillRect/>
+          </a:stretch>
+        </p:blipFill>
+        <p:spPr>
+          <a:xfrm>
+            <a:off x="0" y="0"/>
+            <a:ext cx="12192000" cy="6858000"/>
+          </a:xfrm>
+          <a:prstGeom prst="rect">
+            <a:avLst/>
+          </a:prstGeom>
+        </p:spPr>
+      </p:pic>
+    </p:spTree>
+    <p:extLst>
+      <p:ext uri="{BB962C8B-B14F-4D97-AF65-F5344CB8AC3E}">
+        <p14:creationId xmlns:p14="http://schemas.microsoft.com/office/powerpoint/2010/main" val="1102953875"/>
+      </p:ext>
+    </p:extLst>
+  </p:cSld>
+  <p:clrMapOvr>
+    <a:masterClrMapping/>
+  </p:clrMapOvr>
+</p:sld>
+</file>
+
+<file path=ppt/slides/slide22.xml><?xml version="1.0" encoding="utf-8"?>
+<p:sld xmlns:a="http://schemas.openxmlformats.org/drawingml/2006/main" xmlns:r="http://schemas.openxmlformats.org/officeDocument/2006/relationships" xmlns:p="http://schemas.openxmlformats.org/presentationml/2006/main">
+  <p:cSld>
+    <p:spTree>
+      <p:nvGrpSpPr>
+        <p:cNvPr id="1" name="">
+          <a:extLst>
+            <a:ext uri="{FF2B5EF4-FFF2-40B4-BE49-F238E27FC236}">
+              <a16:creationId xmlns:a16="http://schemas.microsoft.com/office/drawing/2014/main" id="{A930456C-5EBB-FA66-0C44-18D0210ACC5B}"/>
+            </a:ext>
+          </a:extLst>
+        </p:cNvPr>
+        <p:cNvGrpSpPr/>
+        <p:nvPr/>
+      </p:nvGrpSpPr>
+      <p:grpSpPr>
+        <a:xfrm>
+          <a:off x="0" y="0"/>
+          <a:ext cx="0" cy="0"/>
+          <a:chOff x="0" y="0"/>
+          <a:chExt cx="0" cy="0"/>
+        </a:xfrm>
+      </p:grpSpPr>
+      <p:pic>
+        <p:nvPicPr>
+          <p:cNvPr id="3" name="Imagen 2">
+            <a:extLst>
+              <a:ext uri="{FF2B5EF4-FFF2-40B4-BE49-F238E27FC236}">
+                <a16:creationId xmlns:a16="http://schemas.microsoft.com/office/drawing/2014/main" id="{E5110A19-D270-E0BD-8995-67DA69FE4276}"/>
+              </a:ext>
+            </a:extLst>
+          </p:cNvPr>
+          <p:cNvPicPr>
+            <a:picLocks noChangeAspect="1"/>
+          </p:cNvPicPr>
+          <p:nvPr/>
+        </p:nvPicPr>
+        <p:blipFill>
+          <a:blip r:embed="rId2"/>
+          <a:stretch>
+            <a:fillRect/>
+          </a:stretch>
+        </p:blipFill>
+        <p:spPr>
+          <a:xfrm>
+            <a:off x="0" y="0"/>
+            <a:ext cx="12192000" cy="6858000"/>
+          </a:xfrm>
+          <a:prstGeom prst="rect">
+            <a:avLst/>
+          </a:prstGeom>
+        </p:spPr>
+      </p:pic>
+    </p:spTree>
+    <p:extLst>
+      <p:ext uri="{BB962C8B-B14F-4D97-AF65-F5344CB8AC3E}">
+        <p14:creationId xmlns:p14="http://schemas.microsoft.com/office/powerpoint/2010/main" val="15539979"/>
+      </p:ext>
+    </p:extLst>
+  </p:cSld>
+  <p:clrMapOvr>
+    <a:masterClrMapping/>
+  </p:clrMapOvr>
+</p:sld>
+</file>
+
+<file path=ppt/slides/slide23.xml><?xml version="1.0" encoding="utf-8"?>
+<p:sld xmlns:a="http://schemas.openxmlformats.org/drawingml/2006/main" xmlns:r="http://schemas.openxmlformats.org/officeDocument/2006/relationships" xmlns:p="http://schemas.openxmlformats.org/presentationml/2006/main">
+  <p:cSld>
+    <p:spTree>
+      <p:nvGrpSpPr>
+        <p:cNvPr id="1" name="">
+          <a:extLst>
+            <a:ext uri="{FF2B5EF4-FFF2-40B4-BE49-F238E27FC236}">
+              <a16:creationId xmlns:a16="http://schemas.microsoft.com/office/drawing/2014/main" id="{47EBF80E-C62C-943B-EB19-D442F3B955E7}"/>
+            </a:ext>
+          </a:extLst>
+        </p:cNvPr>
+        <p:cNvGrpSpPr/>
+        <p:nvPr/>
+      </p:nvGrpSpPr>
+      <p:grpSpPr>
+        <a:xfrm>
+          <a:off x="0" y="0"/>
+          <a:ext cx="0" cy="0"/>
+          <a:chOff x="0" y="0"/>
+          <a:chExt cx="0" cy="0"/>
+        </a:xfrm>
+      </p:grpSpPr>
+      <p:pic>
+        <p:nvPicPr>
+          <p:cNvPr id="3" name="Imagen 2">
+            <a:extLst>
+              <a:ext uri="{FF2B5EF4-FFF2-40B4-BE49-F238E27FC236}">
+                <a16:creationId xmlns:a16="http://schemas.microsoft.com/office/drawing/2014/main" id="{B9A83192-4335-85CF-AAAB-CBECD7C50D1D}"/>
+              </a:ext>
+            </a:extLst>
+          </p:cNvPr>
+          <p:cNvPicPr>
+            <a:picLocks noChangeAspect="1"/>
+          </p:cNvPicPr>
+          <p:nvPr/>
+        </p:nvPicPr>
+        <p:blipFill>
+          <a:blip r:embed="rId2"/>
+          <a:stretch>
+            <a:fillRect/>
+          </a:stretch>
+        </p:blipFill>
+        <p:spPr>
+          <a:xfrm>
+            <a:off x="0" y="0"/>
+            <a:ext cx="12192000" cy="6858000"/>
+          </a:xfrm>
+          <a:prstGeom prst="rect">
+            <a:avLst/>
+          </a:prstGeom>
+        </p:spPr>
+      </p:pic>
+    </p:spTree>
+    <p:extLst>
+      <p:ext uri="{BB962C8B-B14F-4D97-AF65-F5344CB8AC3E}">
+        <p14:creationId xmlns:p14="http://schemas.microsoft.com/office/powerpoint/2010/main" val="4147114140"/>
+      </p:ext>
+    </p:extLst>
+  </p:cSld>
+  <p:clrMapOvr>
+    <a:masterClrMapping/>
+  </p:clrMapOvr>
+</p:sld>
+</file>
+
+<file path=ppt/slides/slide24.xml><?xml version="1.0" encoding="utf-8"?>
+<p:sld xmlns:a="http://schemas.openxmlformats.org/drawingml/2006/main" xmlns:r="http://schemas.openxmlformats.org/officeDocument/2006/relationships" xmlns:p="http://schemas.openxmlformats.org/presentationml/2006/main">
+  <p:cSld>
+    <p:spTree>
+      <p:nvGrpSpPr>
+        <p:cNvPr id="1" name="">
+          <a:extLst>
+            <a:ext uri="{FF2B5EF4-FFF2-40B4-BE49-F238E27FC236}">
+              <a16:creationId xmlns:a16="http://schemas.microsoft.com/office/drawing/2014/main" id="{FB958324-D0FA-84A4-B349-A72C09A2AC70}"/>
+            </a:ext>
+          </a:extLst>
+        </p:cNvPr>
+        <p:cNvGrpSpPr/>
+        <p:nvPr/>
+      </p:nvGrpSpPr>
+      <p:grpSpPr>
+        <a:xfrm>
+          <a:off x="0" y="0"/>
+          <a:ext cx="0" cy="0"/>
+          <a:chOff x="0" y="0"/>
+          <a:chExt cx="0" cy="0"/>
+        </a:xfrm>
+      </p:grpSpPr>
+      <p:pic>
+        <p:nvPicPr>
+          <p:cNvPr id="3" name="Imagen 2">
+            <a:extLst>
+              <a:ext uri="{FF2B5EF4-FFF2-40B4-BE49-F238E27FC236}">
+                <a16:creationId xmlns:a16="http://schemas.microsoft.com/office/drawing/2014/main" id="{3AD5AF13-B6A4-2B89-092E-E5A28FF6038E}"/>
+              </a:ext>
+            </a:extLst>
+          </p:cNvPr>
+          <p:cNvPicPr>
+            <a:picLocks noChangeAspect="1"/>
+          </p:cNvPicPr>
+          <p:nvPr/>
+        </p:nvPicPr>
+        <p:blipFill>
+          <a:blip r:embed="rId2"/>
+          <a:stretch>
+            <a:fillRect/>
+          </a:stretch>
+        </p:blipFill>
+        <p:spPr>
+          <a:xfrm>
+            <a:off x="0" y="0"/>
+            <a:ext cx="12192000" cy="6858000"/>
+          </a:xfrm>
+          <a:prstGeom prst="rect">
+            <a:avLst/>
+          </a:prstGeom>
+        </p:spPr>
+      </p:pic>
+    </p:spTree>
+    <p:extLst>
+      <p:ext uri="{BB962C8B-B14F-4D97-AF65-F5344CB8AC3E}">
+        <p14:creationId xmlns:p14="http://schemas.microsoft.com/office/powerpoint/2010/main" val="3189470487"/>
+      </p:ext>
+    </p:extLst>
+  </p:cSld>
+  <p:clrMapOvr>
+    <a:masterClrMapping/>
+  </p:clrMapOvr>
+</p:sld>
+</file>
+
+<file path=ppt/slides/slide25.xml><?xml version="1.0" encoding="utf-8"?>
+<p:sld xmlns:a="http://schemas.openxmlformats.org/drawingml/2006/main" xmlns:r="http://schemas.openxmlformats.org/officeDocument/2006/relationships" xmlns:p="http://schemas.openxmlformats.org/presentationml/2006/main">
+  <p:cSld>
+    <p:spTree>
+      <p:nvGrpSpPr>
+        <p:cNvPr id="1" name="">
+          <a:extLst>
+            <a:ext uri="{FF2B5EF4-FFF2-40B4-BE49-F238E27FC236}">
+              <a16:creationId xmlns:a16="http://schemas.microsoft.com/office/drawing/2014/main" id="{711D5BE1-B5F7-8126-4EBC-2438E470CCBA}"/>
+            </a:ext>
+          </a:extLst>
+        </p:cNvPr>
+        <p:cNvGrpSpPr/>
+        <p:nvPr/>
+      </p:nvGrpSpPr>
+      <p:grpSpPr>
+        <a:xfrm>
+          <a:off x="0" y="0"/>
+          <a:ext cx="0" cy="0"/>
+          <a:chOff x="0" y="0"/>
+          <a:chExt cx="0" cy="0"/>
+        </a:xfrm>
+      </p:grpSpPr>
+      <p:pic>
+        <p:nvPicPr>
+          <p:cNvPr id="3" name="Imagen 2">
+            <a:extLst>
+              <a:ext uri="{FF2B5EF4-FFF2-40B4-BE49-F238E27FC236}">
+                <a16:creationId xmlns:a16="http://schemas.microsoft.com/office/drawing/2014/main" id="{A0AB8A63-3D97-AA10-69C7-8C01B8BB43E8}"/>
+              </a:ext>
+            </a:extLst>
+          </p:cNvPr>
+          <p:cNvPicPr>
+            <a:picLocks noChangeAspect="1"/>
+          </p:cNvPicPr>
+          <p:nvPr/>
+        </p:nvPicPr>
+        <p:blipFill>
+          <a:blip r:embed="rId2"/>
+          <a:stretch>
+            <a:fillRect/>
+          </a:stretch>
+        </p:blipFill>
+        <p:spPr>
+          <a:xfrm>
+            <a:off x="0" y="0"/>
+            <a:ext cx="12192000" cy="6858000"/>
+          </a:xfrm>
+          <a:prstGeom prst="rect">
+            <a:avLst/>
+          </a:prstGeom>
+        </p:spPr>
+      </p:pic>
+    </p:spTree>
+    <p:extLst>
+      <p:ext uri="{BB962C8B-B14F-4D97-AF65-F5344CB8AC3E}">
+        <p14:creationId xmlns:p14="http://schemas.microsoft.com/office/powerpoint/2010/main" val="2876170414"/>
+      </p:ext>
+    </p:extLst>
+  </p:cSld>
+  <p:clrMapOvr>
+    <a:masterClrMapping/>
+  </p:clrMapOvr>
+</p:sld>
+</file>
+
+<file path=ppt/slides/slide3.xml><?xml version="1.0" encoding="utf-8"?>
+<p:sld xmlns:a="http://schemas.openxmlformats.org/drawingml/2006/main" xmlns:r="http://schemas.openxmlformats.org/officeDocument/2006/relationships" xmlns:p="http://schemas.openxmlformats.org/presentationml/2006/main">
+  <p:cSld>
+    <p:spTree>
+      <p:nvGrpSpPr>
+        <p:cNvPr id="1" name="">
+          <a:extLst>
+            <a:ext uri="{FF2B5EF4-FFF2-40B4-BE49-F238E27FC236}">
+              <a16:creationId xmlns:a16="http://schemas.microsoft.com/office/drawing/2014/main" id="{8B3BA40A-4CA8-90FA-495E-B93F5461B1AD}"/>
+            </a:ext>
+          </a:extLst>
+        </p:cNvPr>
+        <p:cNvGrpSpPr/>
+        <p:nvPr/>
+      </p:nvGrpSpPr>
+      <p:grpSpPr>
+        <a:xfrm>
+          <a:off x="0" y="0"/>
+          <a:ext cx="0" cy="0"/>
+          <a:chOff x="0" y="0"/>
+          <a:chExt cx="0" cy="0"/>
+        </a:xfrm>
+      </p:grpSpPr>
+      <p:pic>
+        <p:nvPicPr>
+          <p:cNvPr id="3" name="Imagen 2">
+            <a:extLst>
+              <a:ext uri="{FF2B5EF4-FFF2-40B4-BE49-F238E27FC236}">
+                <a16:creationId xmlns:a16="http://schemas.microsoft.com/office/drawing/2014/main" id="{1BE8E76A-1FC4-D511-9024-FF0F48502286}"/>
+              </a:ext>
+            </a:extLst>
+          </p:cNvPr>
+          <p:cNvPicPr>
+            <a:picLocks noChangeAspect="1"/>
+          </p:cNvPicPr>
+          <p:nvPr/>
+        </p:nvPicPr>
+        <p:blipFill>
+          <a:blip r:embed="rId2"/>
+          <a:stretch>
+            <a:fillRect/>
+          </a:stretch>
+        </p:blipFill>
+        <p:spPr>
+          <a:xfrm>
+            <a:off x="0" y="0"/>
+            <a:ext cx="12192000" cy="6858000"/>
+          </a:xfrm>
+          <a:prstGeom prst="rect">
+            <a:avLst/>
+          </a:prstGeom>
+        </p:spPr>
+      </p:pic>
+    </p:spTree>
+    <p:extLst>
+      <p:ext uri="{BB962C8B-B14F-4D97-AF65-F5344CB8AC3E}">
+        <p14:creationId xmlns:p14="http://schemas.microsoft.com/office/powerpoint/2010/main" val="1471351432"/>
+      </p:ext>
+    </p:extLst>
+  </p:cSld>
+  <p:clrMapOvr>
+    <a:masterClrMapping/>
+  </p:clrMapOvr>
+</p:sld>
+</file>
+
+<file path=ppt/slides/slide4.xml><?xml version="1.0" encoding="utf-8"?>
+<p:sld xmlns:a="http://schemas.openxmlformats.org/drawingml/2006/main" xmlns:r="http://schemas.openxmlformats.org/officeDocument/2006/relationships" xmlns:p="http://schemas.openxmlformats.org/presentationml/2006/main">
+  <p:cSld>
+    <p:spTree>
+      <p:nvGrpSpPr>
+        <p:cNvPr id="1" name="">
+          <a:extLst>
+            <a:ext uri="{FF2B5EF4-FFF2-40B4-BE49-F238E27FC236}">
+              <a16:creationId xmlns:a16="http://schemas.microsoft.com/office/drawing/2014/main" id="{8F7D809C-D64B-F325-1588-A0112CC3BD52}"/>
+            </a:ext>
+          </a:extLst>
+        </p:cNvPr>
+        <p:cNvGrpSpPr/>
+        <p:nvPr/>
+      </p:nvGrpSpPr>
+      <p:grpSpPr>
+        <a:xfrm>
+          <a:off x="0" y="0"/>
+          <a:ext cx="0" cy="0"/>
+          <a:chOff x="0" y="0"/>
+          <a:chExt cx="0" cy="0"/>
+        </a:xfrm>
+      </p:grpSpPr>
+      <p:pic>
+        <p:nvPicPr>
+          <p:cNvPr id="3" name="Imagen 2">
+            <a:extLst>
+              <a:ext uri="{FF2B5EF4-FFF2-40B4-BE49-F238E27FC236}">
+                <a16:creationId xmlns:a16="http://schemas.microsoft.com/office/drawing/2014/main" id="{93453414-68AA-4E3F-23F9-5F437A45EF55}"/>
               </a:ext>
             </a:extLst>
           </p:cNvPr>
@@ -4232,7 +4653,7 @@
     </p:spTree>
     <p:extLst>
       <p:ext uri="{BB962C8B-B14F-4D97-AF65-F5344CB8AC3E}">
-        <p14:creationId xmlns:p14="http://schemas.microsoft.com/office/powerpoint/2010/main" val="2545168018"/>
+        <p14:creationId xmlns:p14="http://schemas.microsoft.com/office/powerpoint/2010/main" val="207291528"/>
       </p:ext>
     </p:extLst>
   </p:cSld>
@@ -4242,7 +4663,7 @@
 </p:sld>
 </file>
 
-<file path=ppt/slides/slide6.xml><?xml version="1.0" encoding="utf-8"?>
+<file path=ppt/slides/slide5.xml><?xml version="1.0" encoding="utf-8"?>
 <p:sld xmlns:a="http://schemas.openxmlformats.org/drawingml/2006/main" xmlns:r="http://schemas.openxmlformats.org/officeDocument/2006/relationships" xmlns:p="http://schemas.openxmlformats.org/presentationml/2006/main">
   <p:cSld>
     <p:spTree>
@@ -4250,7 +4671,7 @@
         <p:cNvPr id="1" name="">
           <a:extLst>
             <a:ext uri="{FF2B5EF4-FFF2-40B4-BE49-F238E27FC236}">
-              <a16:creationId xmlns:a16="http://schemas.microsoft.com/office/drawing/2014/main" id="{61A45522-6E5A-0106-C970-D4E7E7689441}"/>
+              <a16:creationId xmlns:a16="http://schemas.microsoft.com/office/drawing/2014/main" id="{CCDE8601-D886-4FD9-6559-1E19AC49EB7C}"/>
             </a:ext>
           </a:extLst>
         </p:cNvPr>
@@ -4270,7 +4691,7 @@
           <p:cNvPr id="3" name="Imagen 2">
             <a:extLst>
               <a:ext uri="{FF2B5EF4-FFF2-40B4-BE49-F238E27FC236}">
-                <a16:creationId xmlns:a16="http://schemas.microsoft.com/office/drawing/2014/main" id="{22EE9BE3-C38A-2AEF-AE07-1A6C84B1AA48}"/>
+                <a16:creationId xmlns:a16="http://schemas.microsoft.com/office/drawing/2014/main" id="{2B0C2D72-99FD-FADB-71C8-7819423F8105}"/>
               </a:ext>
             </a:extLst>
           </p:cNvPr>
@@ -4298,7 +4719,73 @@
     </p:spTree>
     <p:extLst>
       <p:ext uri="{BB962C8B-B14F-4D97-AF65-F5344CB8AC3E}">
-        <p14:creationId xmlns:p14="http://schemas.microsoft.com/office/powerpoint/2010/main" val="1915896127"/>
+        <p14:creationId xmlns:p14="http://schemas.microsoft.com/office/powerpoint/2010/main" val="2154117816"/>
+      </p:ext>
+    </p:extLst>
+  </p:cSld>
+  <p:clrMapOvr>
+    <a:masterClrMapping/>
+  </p:clrMapOvr>
+</p:sld>
+</file>
+
+<file path=ppt/slides/slide6.xml><?xml version="1.0" encoding="utf-8"?>
+<p:sld xmlns:a="http://schemas.openxmlformats.org/drawingml/2006/main" xmlns:r="http://schemas.openxmlformats.org/officeDocument/2006/relationships" xmlns:p="http://schemas.openxmlformats.org/presentationml/2006/main">
+  <p:cSld>
+    <p:spTree>
+      <p:nvGrpSpPr>
+        <p:cNvPr id="1" name="">
+          <a:extLst>
+            <a:ext uri="{FF2B5EF4-FFF2-40B4-BE49-F238E27FC236}">
+              <a16:creationId xmlns:a16="http://schemas.microsoft.com/office/drawing/2014/main" id="{8048EDDA-EC35-81A6-9242-35960801BF1C}"/>
+            </a:ext>
+          </a:extLst>
+        </p:cNvPr>
+        <p:cNvGrpSpPr/>
+        <p:nvPr/>
+      </p:nvGrpSpPr>
+      <p:grpSpPr>
+        <a:xfrm>
+          <a:off x="0" y="0"/>
+          <a:ext cx="0" cy="0"/>
+          <a:chOff x="0" y="0"/>
+          <a:chExt cx="0" cy="0"/>
+        </a:xfrm>
+      </p:grpSpPr>
+      <p:pic>
+        <p:nvPicPr>
+          <p:cNvPr id="3" name="Imagen 2">
+            <a:extLst>
+              <a:ext uri="{FF2B5EF4-FFF2-40B4-BE49-F238E27FC236}">
+                <a16:creationId xmlns:a16="http://schemas.microsoft.com/office/drawing/2014/main" id="{AE0C5D32-1476-CC98-3292-81529D85BCAD}"/>
+              </a:ext>
+            </a:extLst>
+          </p:cNvPr>
+          <p:cNvPicPr>
+            <a:picLocks noChangeAspect="1"/>
+          </p:cNvPicPr>
+          <p:nvPr/>
+        </p:nvPicPr>
+        <p:blipFill>
+          <a:blip r:embed="rId2"/>
+          <a:stretch>
+            <a:fillRect/>
+          </a:stretch>
+        </p:blipFill>
+        <p:spPr>
+          <a:xfrm>
+            <a:off x="0" y="0"/>
+            <a:ext cx="12192000" cy="6857999"/>
+          </a:xfrm>
+          <a:prstGeom prst="rect">
+            <a:avLst/>
+          </a:prstGeom>
+        </p:spPr>
+      </p:pic>
+    </p:spTree>
+    <p:extLst>
+      <p:ext uri="{BB962C8B-B14F-4D97-AF65-F5344CB8AC3E}">
+        <p14:creationId xmlns:p14="http://schemas.microsoft.com/office/powerpoint/2010/main" val="886143178"/>
       </p:ext>
     </p:extLst>
   </p:cSld>
@@ -4316,7 +4803,7 @@
         <p:cNvPr id="1" name="">
           <a:extLst>
             <a:ext uri="{FF2B5EF4-FFF2-40B4-BE49-F238E27FC236}">
-              <a16:creationId xmlns:a16="http://schemas.microsoft.com/office/drawing/2014/main" id="{0A88AF29-F3C1-A599-07F5-511238023913}"/>
+              <a16:creationId xmlns:a16="http://schemas.microsoft.com/office/drawing/2014/main" id="{71970C7A-23AB-9F4D-808D-F0639CB3BF85}"/>
             </a:ext>
           </a:extLst>
         </p:cNvPr>
@@ -4336,7 +4823,7 @@
           <p:cNvPr id="3" name="Imagen 2">
             <a:extLst>
               <a:ext uri="{FF2B5EF4-FFF2-40B4-BE49-F238E27FC236}">
-                <a16:creationId xmlns:a16="http://schemas.microsoft.com/office/drawing/2014/main" id="{1DB02957-F678-AAC3-AFBE-1BB4A7ECCA88}"/>
+                <a16:creationId xmlns:a16="http://schemas.microsoft.com/office/drawing/2014/main" id="{C1A1F03A-E921-909E-DFD5-08ED8279D8C9}"/>
               </a:ext>
             </a:extLst>
           </p:cNvPr>
@@ -4364,7 +4851,7 @@
     </p:spTree>
     <p:extLst>
       <p:ext uri="{BB962C8B-B14F-4D97-AF65-F5344CB8AC3E}">
-        <p14:creationId xmlns:p14="http://schemas.microsoft.com/office/powerpoint/2010/main" val="3761695225"/>
+        <p14:creationId xmlns:p14="http://schemas.microsoft.com/office/powerpoint/2010/main" val="1404436954"/>
       </p:ext>
     </p:extLst>
   </p:cSld>
@@ -4382,7 +4869,73 @@
         <p:cNvPr id="1" name="">
           <a:extLst>
             <a:ext uri="{FF2B5EF4-FFF2-40B4-BE49-F238E27FC236}">
-              <a16:creationId xmlns:a16="http://schemas.microsoft.com/office/drawing/2014/main" id="{2897D774-DD59-2FD1-F883-B422A6D71926}"/>
+              <a16:creationId xmlns:a16="http://schemas.microsoft.com/office/drawing/2014/main" id="{BF11B56D-7C27-B406-A521-13AF520356D4}"/>
+            </a:ext>
+          </a:extLst>
+        </p:cNvPr>
+        <p:cNvGrpSpPr/>
+        <p:nvPr/>
+      </p:nvGrpSpPr>
+      <p:grpSpPr>
+        <a:xfrm>
+          <a:off x="0" y="0"/>
+          <a:ext cx="0" cy="0"/>
+          <a:chOff x="0" y="0"/>
+          <a:chExt cx="0" cy="0"/>
+        </a:xfrm>
+      </p:grpSpPr>
+      <p:pic>
+        <p:nvPicPr>
+          <p:cNvPr id="5" name="Imagen 4">
+            <a:extLst>
+              <a:ext uri="{FF2B5EF4-FFF2-40B4-BE49-F238E27FC236}">
+                <a16:creationId xmlns:a16="http://schemas.microsoft.com/office/drawing/2014/main" id="{83D67FEB-4499-DD4E-EA3D-0C4A724B02D0}"/>
+              </a:ext>
+            </a:extLst>
+          </p:cNvPr>
+          <p:cNvPicPr>
+            <a:picLocks noChangeAspect="1"/>
+          </p:cNvPicPr>
+          <p:nvPr/>
+        </p:nvPicPr>
+        <p:blipFill>
+          <a:blip r:embed="rId2"/>
+          <a:stretch>
+            <a:fillRect/>
+          </a:stretch>
+        </p:blipFill>
+        <p:spPr>
+          <a:xfrm>
+            <a:off x="0" y="9832"/>
+            <a:ext cx="12191999" cy="6858000"/>
+          </a:xfrm>
+          <a:prstGeom prst="rect">
+            <a:avLst/>
+          </a:prstGeom>
+        </p:spPr>
+      </p:pic>
+    </p:spTree>
+    <p:extLst>
+      <p:ext uri="{BB962C8B-B14F-4D97-AF65-F5344CB8AC3E}">
+        <p14:creationId xmlns:p14="http://schemas.microsoft.com/office/powerpoint/2010/main" val="3699049160"/>
+      </p:ext>
+    </p:extLst>
+  </p:cSld>
+  <p:clrMapOvr>
+    <a:masterClrMapping/>
+  </p:clrMapOvr>
+</p:sld>
+</file>
+
+<file path=ppt/slides/slide9.xml><?xml version="1.0" encoding="utf-8"?>
+<p:sld xmlns:a="http://schemas.openxmlformats.org/drawingml/2006/main" xmlns:r="http://schemas.openxmlformats.org/officeDocument/2006/relationships" xmlns:p="http://schemas.openxmlformats.org/presentationml/2006/main">
+  <p:cSld>
+    <p:spTree>
+      <p:nvGrpSpPr>
+        <p:cNvPr id="1" name="">
+          <a:extLst>
+            <a:ext uri="{FF2B5EF4-FFF2-40B4-BE49-F238E27FC236}">
+              <a16:creationId xmlns:a16="http://schemas.microsoft.com/office/drawing/2014/main" id="{F83BB9C1-FF28-D509-F258-557672013B65}"/>
             </a:ext>
           </a:extLst>
         </p:cNvPr>
@@ -4402,7 +4955,7 @@
           <p:cNvPr id="3" name="Imagen 2">
             <a:extLst>
               <a:ext uri="{FF2B5EF4-FFF2-40B4-BE49-F238E27FC236}">
-                <a16:creationId xmlns:a16="http://schemas.microsoft.com/office/drawing/2014/main" id="{818B7626-5D9E-E0C9-9D59-82EAFAFEA166}"/>
+                <a16:creationId xmlns:a16="http://schemas.microsoft.com/office/drawing/2014/main" id="{F25F1CE2-1ED8-2694-ACEC-8C156B3E6099}"/>
               </a:ext>
             </a:extLst>
           </p:cNvPr>
@@ -4420,7 +4973,7 @@
         <p:spPr>
           <a:xfrm>
             <a:off x="0" y="0"/>
-            <a:ext cx="12192000" cy="6858000"/>
+            <a:ext cx="12191999" cy="6858000"/>
           </a:xfrm>
           <a:prstGeom prst="rect">
             <a:avLst/>
@@ -4430,73 +4983,7 @@
     </p:spTree>
     <p:extLst>
       <p:ext uri="{BB962C8B-B14F-4D97-AF65-F5344CB8AC3E}">
-        <p14:creationId xmlns:p14="http://schemas.microsoft.com/office/powerpoint/2010/main" val="4005880228"/>
-      </p:ext>
-    </p:extLst>
-  </p:cSld>
-  <p:clrMapOvr>
-    <a:masterClrMapping/>
-  </p:clrMapOvr>
-</p:sld>
-</file>
-
-<file path=ppt/slides/slide9.xml><?xml version="1.0" encoding="utf-8"?>
-<p:sld xmlns:a="http://schemas.openxmlformats.org/drawingml/2006/main" xmlns:r="http://schemas.openxmlformats.org/officeDocument/2006/relationships" xmlns:p="http://schemas.openxmlformats.org/presentationml/2006/main">
-  <p:cSld>
-    <p:spTree>
-      <p:nvGrpSpPr>
-        <p:cNvPr id="1" name="">
-          <a:extLst>
-            <a:ext uri="{FF2B5EF4-FFF2-40B4-BE49-F238E27FC236}">
-              <a16:creationId xmlns:a16="http://schemas.microsoft.com/office/drawing/2014/main" id="{8EA4A471-AAC3-2802-1EC7-F8A924EF9BD7}"/>
-            </a:ext>
-          </a:extLst>
-        </p:cNvPr>
-        <p:cNvGrpSpPr/>
-        <p:nvPr/>
-      </p:nvGrpSpPr>
-      <p:grpSpPr>
-        <a:xfrm>
-          <a:off x="0" y="0"/>
-          <a:ext cx="0" cy="0"/>
-          <a:chOff x="0" y="0"/>
-          <a:chExt cx="0" cy="0"/>
-        </a:xfrm>
-      </p:grpSpPr>
-      <p:pic>
-        <p:nvPicPr>
-          <p:cNvPr id="3" name="Imagen 2">
-            <a:extLst>
-              <a:ext uri="{FF2B5EF4-FFF2-40B4-BE49-F238E27FC236}">
-                <a16:creationId xmlns:a16="http://schemas.microsoft.com/office/drawing/2014/main" id="{2D9C1173-5A56-D5D5-DD5E-F2C5D0102016}"/>
-              </a:ext>
-            </a:extLst>
-          </p:cNvPr>
-          <p:cNvPicPr>
-            <a:picLocks noChangeAspect="1"/>
-          </p:cNvPicPr>
-          <p:nvPr/>
-        </p:nvPicPr>
-        <p:blipFill>
-          <a:blip r:embed="rId2"/>
-          <a:stretch>
-            <a:fillRect/>
-          </a:stretch>
-        </p:blipFill>
-        <p:spPr>
-          <a:xfrm>
-            <a:off x="0" y="0"/>
-            <a:ext cx="12192000" cy="6858000"/>
-          </a:xfrm>
-          <a:prstGeom prst="rect">
-            <a:avLst/>
-          </a:prstGeom>
-        </p:spPr>
-      </p:pic>
-    </p:spTree>
-    <p:extLst>
-      <p:ext uri="{BB962C8B-B14F-4D97-AF65-F5344CB8AC3E}">
-        <p14:creationId xmlns:p14="http://schemas.microsoft.com/office/powerpoint/2010/main" val="923665534"/>
+        <p14:creationId xmlns:p14="http://schemas.microsoft.com/office/powerpoint/2010/main" val="3643563939"/>
       </p:ext>
     </p:extLst>
   </p:cSld>

--- a/entrega_intermedia/presentacion-intermedia-SocioUnido.pptx
+++ b/entrega_intermedia/presentacion-intermedia-SocioUnido.pptx
@@ -6,29 +6,29 @@
   </p:sldMasterIdLst>
   <p:sldIdLst>
     <p:sldId id="256" r:id="rId2"/>
-    <p:sldId id="257" r:id="rId3"/>
-    <p:sldId id="258" r:id="rId4"/>
-    <p:sldId id="259" r:id="rId5"/>
-    <p:sldId id="260" r:id="rId6"/>
-    <p:sldId id="261" r:id="rId7"/>
-    <p:sldId id="262" r:id="rId8"/>
-    <p:sldId id="263" r:id="rId9"/>
-    <p:sldId id="264" r:id="rId10"/>
-    <p:sldId id="265" r:id="rId11"/>
-    <p:sldId id="266" r:id="rId12"/>
-    <p:sldId id="267" r:id="rId13"/>
-    <p:sldId id="268" r:id="rId14"/>
-    <p:sldId id="269" r:id="rId15"/>
-    <p:sldId id="270" r:id="rId16"/>
-    <p:sldId id="271" r:id="rId17"/>
-    <p:sldId id="272" r:id="rId18"/>
-    <p:sldId id="273" r:id="rId19"/>
-    <p:sldId id="274" r:id="rId20"/>
-    <p:sldId id="275" r:id="rId21"/>
-    <p:sldId id="276" r:id="rId22"/>
-    <p:sldId id="277" r:id="rId23"/>
-    <p:sldId id="278" r:id="rId24"/>
-    <p:sldId id="279" r:id="rId25"/>
+    <p:sldId id="258" r:id="rId3"/>
+    <p:sldId id="259" r:id="rId4"/>
+    <p:sldId id="260" r:id="rId5"/>
+    <p:sldId id="261" r:id="rId6"/>
+    <p:sldId id="262" r:id="rId7"/>
+    <p:sldId id="263" r:id="rId8"/>
+    <p:sldId id="264" r:id="rId9"/>
+    <p:sldId id="265" r:id="rId10"/>
+    <p:sldId id="266" r:id="rId11"/>
+    <p:sldId id="267" r:id="rId12"/>
+    <p:sldId id="268" r:id="rId13"/>
+    <p:sldId id="269" r:id="rId14"/>
+    <p:sldId id="270" r:id="rId15"/>
+    <p:sldId id="271" r:id="rId16"/>
+    <p:sldId id="272" r:id="rId17"/>
+    <p:sldId id="273" r:id="rId18"/>
+    <p:sldId id="274" r:id="rId19"/>
+    <p:sldId id="275" r:id="rId20"/>
+    <p:sldId id="276" r:id="rId21"/>
+    <p:sldId id="277" r:id="rId22"/>
+    <p:sldId id="278" r:id="rId23"/>
+    <p:sldId id="279" r:id="rId24"/>
+    <p:sldId id="257" r:id="rId25"/>
     <p:sldId id="280" r:id="rId26"/>
   </p:sldIdLst>
   <p:sldSz cx="12192000" cy="6858000"/>
@@ -128,6 +128,11 @@
       </a:defRPr>
     </a:lvl9pPr>
   </p:defaultTextStyle>
+  <p:extLst>
+    <p:ext uri="{EFAFB233-063F-42B5-8137-9DF3F51BA10A}">
+      <p15:sldGuideLst xmlns:p15="http://schemas.microsoft.com/office/powerpoint/2012/main"/>
+    </p:ext>
+  </p:extLst>
 </p:presentation>
 </file>
 
@@ -280,7 +285,7 @@
           <a:p>
             <a:fld id="{306FF930-1B1D-4D9D-94F7-484F0D0B4167}" type="datetimeFigureOut">
               <a:rPr lang="es-AR" smtClean="0"/>
-              <a:t>23/6/2026</a:t>
+              <a:t>25/6/2026</a:t>
             </a:fld>
             <a:endParaRPr lang="es-AR"/>
           </a:p>
@@ -334,7 +339,7 @@
           <a:p>
             <a:fld id="{5E747B70-7BF8-4839-B134-BDC359C860DC}" type="slidenum">
               <a:rPr lang="es-AR" smtClean="0"/>
-              <a:t>‹Nº›</a:t>
+              <a:t>‹#›</a:t>
             </a:fld>
             <a:endParaRPr lang="es-AR"/>
           </a:p>
@@ -480,7 +485,7 @@
           <a:p>
             <a:fld id="{306FF930-1B1D-4D9D-94F7-484F0D0B4167}" type="datetimeFigureOut">
               <a:rPr lang="es-AR" smtClean="0"/>
-              <a:t>23/6/2026</a:t>
+              <a:t>25/6/2026</a:t>
             </a:fld>
             <a:endParaRPr lang="es-AR"/>
           </a:p>
@@ -534,7 +539,7 @@
           <a:p>
             <a:fld id="{5E747B70-7BF8-4839-B134-BDC359C860DC}" type="slidenum">
               <a:rPr lang="es-AR" smtClean="0"/>
-              <a:t>‹Nº›</a:t>
+              <a:t>‹#›</a:t>
             </a:fld>
             <a:endParaRPr lang="es-AR"/>
           </a:p>
@@ -690,7 +695,7 @@
           <a:p>
             <a:fld id="{306FF930-1B1D-4D9D-94F7-484F0D0B4167}" type="datetimeFigureOut">
               <a:rPr lang="es-AR" smtClean="0"/>
-              <a:t>23/6/2026</a:t>
+              <a:t>25/6/2026</a:t>
             </a:fld>
             <a:endParaRPr lang="es-AR"/>
           </a:p>
@@ -744,7 +749,7 @@
           <a:p>
             <a:fld id="{5E747B70-7BF8-4839-B134-BDC359C860DC}" type="slidenum">
               <a:rPr lang="es-AR" smtClean="0"/>
-              <a:t>‹Nº›</a:t>
+              <a:t>‹#›</a:t>
             </a:fld>
             <a:endParaRPr lang="es-AR"/>
           </a:p>
@@ -890,7 +895,7 @@
           <a:p>
             <a:fld id="{306FF930-1B1D-4D9D-94F7-484F0D0B4167}" type="datetimeFigureOut">
               <a:rPr lang="es-AR" smtClean="0"/>
-              <a:t>23/6/2026</a:t>
+              <a:t>25/6/2026</a:t>
             </a:fld>
             <a:endParaRPr lang="es-AR"/>
           </a:p>
@@ -944,7 +949,7 @@
           <a:p>
             <a:fld id="{5E747B70-7BF8-4839-B134-BDC359C860DC}" type="slidenum">
               <a:rPr lang="es-AR" smtClean="0"/>
-              <a:t>‹Nº›</a:t>
+              <a:t>‹#›</a:t>
             </a:fld>
             <a:endParaRPr lang="es-AR"/>
           </a:p>
@@ -1166,7 +1171,7 @@
           <a:p>
             <a:fld id="{306FF930-1B1D-4D9D-94F7-484F0D0B4167}" type="datetimeFigureOut">
               <a:rPr lang="es-AR" smtClean="0"/>
-              <a:t>23/6/2026</a:t>
+              <a:t>25/6/2026</a:t>
             </a:fld>
             <a:endParaRPr lang="es-AR"/>
           </a:p>
@@ -1220,7 +1225,7 @@
           <a:p>
             <a:fld id="{5E747B70-7BF8-4839-B134-BDC359C860DC}" type="slidenum">
               <a:rPr lang="es-AR" smtClean="0"/>
-              <a:t>‹Nº›</a:t>
+              <a:t>‹#›</a:t>
             </a:fld>
             <a:endParaRPr lang="es-AR"/>
           </a:p>
@@ -1434,7 +1439,7 @@
           <a:p>
             <a:fld id="{306FF930-1B1D-4D9D-94F7-484F0D0B4167}" type="datetimeFigureOut">
               <a:rPr lang="es-AR" smtClean="0"/>
-              <a:t>23/6/2026</a:t>
+              <a:t>25/6/2026</a:t>
             </a:fld>
             <a:endParaRPr lang="es-AR"/>
           </a:p>
@@ -1488,7 +1493,7 @@
           <a:p>
             <a:fld id="{5E747B70-7BF8-4839-B134-BDC359C860DC}" type="slidenum">
               <a:rPr lang="es-AR" smtClean="0"/>
-              <a:t>‹Nº›</a:t>
+              <a:t>‹#›</a:t>
             </a:fld>
             <a:endParaRPr lang="es-AR"/>
           </a:p>
@@ -1849,7 +1854,7 @@
           <a:p>
             <a:fld id="{306FF930-1B1D-4D9D-94F7-484F0D0B4167}" type="datetimeFigureOut">
               <a:rPr lang="es-AR" smtClean="0"/>
-              <a:t>23/6/2026</a:t>
+              <a:t>25/6/2026</a:t>
             </a:fld>
             <a:endParaRPr lang="es-AR"/>
           </a:p>
@@ -1903,7 +1908,7 @@
           <a:p>
             <a:fld id="{5E747B70-7BF8-4839-B134-BDC359C860DC}" type="slidenum">
               <a:rPr lang="es-AR" smtClean="0"/>
-              <a:t>‹Nº›</a:t>
+              <a:t>‹#›</a:t>
             </a:fld>
             <a:endParaRPr lang="es-AR"/>
           </a:p>
@@ -1991,7 +1996,7 @@
           <a:p>
             <a:fld id="{306FF930-1B1D-4D9D-94F7-484F0D0B4167}" type="datetimeFigureOut">
               <a:rPr lang="es-AR" smtClean="0"/>
-              <a:t>23/6/2026</a:t>
+              <a:t>25/6/2026</a:t>
             </a:fld>
             <a:endParaRPr lang="es-AR"/>
           </a:p>
@@ -2045,7 +2050,7 @@
           <a:p>
             <a:fld id="{5E747B70-7BF8-4839-B134-BDC359C860DC}" type="slidenum">
               <a:rPr lang="es-AR" smtClean="0"/>
-              <a:t>‹Nº›</a:t>
+              <a:t>‹#›</a:t>
             </a:fld>
             <a:endParaRPr lang="es-AR"/>
           </a:p>
@@ -2104,7 +2109,7 @@
           <a:p>
             <a:fld id="{306FF930-1B1D-4D9D-94F7-484F0D0B4167}" type="datetimeFigureOut">
               <a:rPr lang="es-AR" smtClean="0"/>
-              <a:t>23/6/2026</a:t>
+              <a:t>25/6/2026</a:t>
             </a:fld>
             <a:endParaRPr lang="es-AR"/>
           </a:p>
@@ -2158,7 +2163,7 @@
           <a:p>
             <a:fld id="{5E747B70-7BF8-4839-B134-BDC359C860DC}" type="slidenum">
               <a:rPr lang="es-AR" smtClean="0"/>
-              <a:t>‹Nº›</a:t>
+              <a:t>‹#›</a:t>
             </a:fld>
             <a:endParaRPr lang="es-AR"/>
           </a:p>
@@ -2417,7 +2422,7 @@
           <a:p>
             <a:fld id="{306FF930-1B1D-4D9D-94F7-484F0D0B4167}" type="datetimeFigureOut">
               <a:rPr lang="es-AR" smtClean="0"/>
-              <a:t>23/6/2026</a:t>
+              <a:t>25/6/2026</a:t>
             </a:fld>
             <a:endParaRPr lang="es-AR"/>
           </a:p>
@@ -2471,7 +2476,7 @@
           <a:p>
             <a:fld id="{5E747B70-7BF8-4839-B134-BDC359C860DC}" type="slidenum">
               <a:rPr lang="es-AR" smtClean="0"/>
-              <a:t>‹Nº›</a:t>
+              <a:t>‹#›</a:t>
             </a:fld>
             <a:endParaRPr lang="es-AR"/>
           </a:p>
@@ -2706,7 +2711,7 @@
           <a:p>
             <a:fld id="{306FF930-1B1D-4D9D-94F7-484F0D0B4167}" type="datetimeFigureOut">
               <a:rPr lang="es-AR" smtClean="0"/>
-              <a:t>23/6/2026</a:t>
+              <a:t>25/6/2026</a:t>
             </a:fld>
             <a:endParaRPr lang="es-AR"/>
           </a:p>
@@ -2760,7 +2765,7 @@
           <a:p>
             <a:fld id="{5E747B70-7BF8-4839-B134-BDC359C860DC}" type="slidenum">
               <a:rPr lang="es-AR" smtClean="0"/>
-              <a:t>‹Nº›</a:t>
+              <a:t>‹#›</a:t>
             </a:fld>
             <a:endParaRPr lang="es-AR"/>
           </a:p>
@@ -2949,7 +2954,7 @@
           <a:p>
             <a:fld id="{306FF930-1B1D-4D9D-94F7-484F0D0B4167}" type="datetimeFigureOut">
               <a:rPr lang="es-AR" smtClean="0"/>
-              <a:t>23/6/2026</a:t>
+              <a:t>25/6/2026</a:t>
             </a:fld>
             <a:endParaRPr lang="es-AR"/>
           </a:p>
@@ -3039,7 +3044,7 @@
           <a:p>
             <a:fld id="{5E747B70-7BF8-4839-B134-BDC359C860DC}" type="slidenum">
               <a:rPr lang="es-AR" smtClean="0"/>
-              <a:t>‹Nº›</a:t>
+              <a:t>‹#›</a:t>
             </a:fld>
             <a:endParaRPr lang="es-AR"/>
           </a:p>
@@ -3417,72 +3422,6 @@
         <p:cNvPr id="1" name="">
           <a:extLst>
             <a:ext uri="{FF2B5EF4-FFF2-40B4-BE49-F238E27FC236}">
-              <a16:creationId xmlns:a16="http://schemas.microsoft.com/office/drawing/2014/main" id="{7C29125E-EF22-B0FB-EC1C-611DF9C262B3}"/>
-            </a:ext>
-          </a:extLst>
-        </p:cNvPr>
-        <p:cNvGrpSpPr/>
-        <p:nvPr/>
-      </p:nvGrpSpPr>
-      <p:grpSpPr>
-        <a:xfrm>
-          <a:off x="0" y="0"/>
-          <a:ext cx="0" cy="0"/>
-          <a:chOff x="0" y="0"/>
-          <a:chExt cx="0" cy="0"/>
-        </a:xfrm>
-      </p:grpSpPr>
-      <p:pic>
-        <p:nvPicPr>
-          <p:cNvPr id="3" name="Imagen 2">
-            <a:extLst>
-              <a:ext uri="{FF2B5EF4-FFF2-40B4-BE49-F238E27FC236}">
-                <a16:creationId xmlns:a16="http://schemas.microsoft.com/office/drawing/2014/main" id="{CA88DB13-AB86-0353-0DDB-29B62B1BA7F7}"/>
-              </a:ext>
-            </a:extLst>
-          </p:cNvPr>
-          <p:cNvPicPr>
-            <a:picLocks noChangeAspect="1"/>
-          </p:cNvPicPr>
-          <p:nvPr/>
-        </p:nvPicPr>
-        <p:blipFill>
-          <a:blip r:embed="rId2"/>
-          <a:stretch>
-            <a:fillRect/>
-          </a:stretch>
-        </p:blipFill>
-        <p:spPr>
-          <a:xfrm>
-            <a:off x="0" y="0"/>
-            <a:ext cx="12192000" cy="6858000"/>
-          </a:xfrm>
-          <a:prstGeom prst="rect">
-            <a:avLst/>
-          </a:prstGeom>
-        </p:spPr>
-      </p:pic>
-    </p:spTree>
-    <p:extLst>
-      <p:ext uri="{BB962C8B-B14F-4D97-AF65-F5344CB8AC3E}">
-        <p14:creationId xmlns:p14="http://schemas.microsoft.com/office/powerpoint/2010/main" val="2943224096"/>
-      </p:ext>
-    </p:extLst>
-  </p:cSld>
-  <p:clrMapOvr>
-    <a:masterClrMapping/>
-  </p:clrMapOvr>
-</p:sld>
-</file>
-
-<file path=ppt/slides/slide11.xml><?xml version="1.0" encoding="utf-8"?>
-<p:sld xmlns:a="http://schemas.openxmlformats.org/drawingml/2006/main" xmlns:r="http://schemas.openxmlformats.org/officeDocument/2006/relationships" xmlns:p="http://schemas.openxmlformats.org/presentationml/2006/main">
-  <p:cSld>
-    <p:spTree>
-      <p:nvGrpSpPr>
-        <p:cNvPr id="1" name="">
-          <a:extLst>
-            <a:ext uri="{FF2B5EF4-FFF2-40B4-BE49-F238E27FC236}">
               <a16:creationId xmlns:a16="http://schemas.microsoft.com/office/drawing/2014/main" id="{ABE1AC16-E673-69A5-4C30-98A99CA6F8B5}"/>
             </a:ext>
           </a:extLst>
@@ -3541,7 +3480,7 @@
 </p:sld>
 </file>
 
-<file path=ppt/slides/slide12.xml><?xml version="1.0" encoding="utf-8"?>
+<file path=ppt/slides/slide11.xml><?xml version="1.0" encoding="utf-8"?>
 <p:sld xmlns:a="http://schemas.openxmlformats.org/drawingml/2006/main" xmlns:r="http://schemas.openxmlformats.org/officeDocument/2006/relationships" xmlns:p="http://schemas.openxmlformats.org/presentationml/2006/main">
   <p:cSld>
     <p:spTree>
@@ -3607,7 +3546,7 @@
 </p:sld>
 </file>
 
-<file path=ppt/slides/slide13.xml><?xml version="1.0" encoding="utf-8"?>
+<file path=ppt/slides/slide12.xml><?xml version="1.0" encoding="utf-8"?>
 <p:sld xmlns:a="http://schemas.openxmlformats.org/drawingml/2006/main" xmlns:r="http://schemas.openxmlformats.org/officeDocument/2006/relationships" xmlns:p="http://schemas.openxmlformats.org/presentationml/2006/main">
   <p:cSld>
     <p:spTree>
@@ -3673,7 +3612,7 @@
 </p:sld>
 </file>
 
-<file path=ppt/slides/slide14.xml><?xml version="1.0" encoding="utf-8"?>
+<file path=ppt/slides/slide13.xml><?xml version="1.0" encoding="utf-8"?>
 <p:sld xmlns:a="http://schemas.openxmlformats.org/drawingml/2006/main" xmlns:r="http://schemas.openxmlformats.org/officeDocument/2006/relationships" xmlns:p="http://schemas.openxmlformats.org/presentationml/2006/main">
   <p:cSld>
     <p:spTree>
@@ -3739,7 +3678,7 @@
 </p:sld>
 </file>
 
-<file path=ppt/slides/slide15.xml><?xml version="1.0" encoding="utf-8"?>
+<file path=ppt/slides/slide14.xml><?xml version="1.0" encoding="utf-8"?>
 <p:sld xmlns:a="http://schemas.openxmlformats.org/drawingml/2006/main" xmlns:r="http://schemas.openxmlformats.org/officeDocument/2006/relationships" xmlns:p="http://schemas.openxmlformats.org/presentationml/2006/main">
   <p:cSld>
     <p:spTree>
@@ -3805,7 +3744,7 @@
 </p:sld>
 </file>
 
-<file path=ppt/slides/slide16.xml><?xml version="1.0" encoding="utf-8"?>
+<file path=ppt/slides/slide15.xml><?xml version="1.0" encoding="utf-8"?>
 <p:sld xmlns:a="http://schemas.openxmlformats.org/drawingml/2006/main" xmlns:r="http://schemas.openxmlformats.org/officeDocument/2006/relationships" xmlns:p="http://schemas.openxmlformats.org/presentationml/2006/main">
   <p:cSld>
     <p:spTree>
@@ -3871,7 +3810,7 @@
 </p:sld>
 </file>
 
-<file path=ppt/slides/slide17.xml><?xml version="1.0" encoding="utf-8"?>
+<file path=ppt/slides/slide16.xml><?xml version="1.0" encoding="utf-8"?>
 <p:sld xmlns:a="http://schemas.openxmlformats.org/drawingml/2006/main" xmlns:r="http://schemas.openxmlformats.org/officeDocument/2006/relationships" xmlns:p="http://schemas.openxmlformats.org/presentationml/2006/main">
   <p:cSld>
     <p:spTree>
@@ -3937,7 +3876,7 @@
 </p:sld>
 </file>
 
-<file path=ppt/slides/slide18.xml><?xml version="1.0" encoding="utf-8"?>
+<file path=ppt/slides/slide17.xml><?xml version="1.0" encoding="utf-8"?>
 <p:sld xmlns:a="http://schemas.openxmlformats.org/drawingml/2006/main" xmlns:r="http://schemas.openxmlformats.org/officeDocument/2006/relationships" xmlns:p="http://schemas.openxmlformats.org/presentationml/2006/main">
   <p:cSld>
     <p:spTree>
@@ -4003,7 +3942,7 @@
 </p:sld>
 </file>
 
-<file path=ppt/slides/slide19.xml><?xml version="1.0" encoding="utf-8"?>
+<file path=ppt/slides/slide18.xml><?xml version="1.0" encoding="utf-8"?>
 <p:sld xmlns:a="http://schemas.openxmlformats.org/drawingml/2006/main" xmlns:r="http://schemas.openxmlformats.org/officeDocument/2006/relationships" xmlns:p="http://schemas.openxmlformats.org/presentationml/2006/main">
   <p:cSld>
     <p:spTree>
@@ -4069,73 +4008,7 @@
 </p:sld>
 </file>
 
-<file path=ppt/slides/slide2.xml><?xml version="1.0" encoding="utf-8"?>
-<p:sld xmlns:a="http://schemas.openxmlformats.org/drawingml/2006/main" xmlns:r="http://schemas.openxmlformats.org/officeDocument/2006/relationships" xmlns:p="http://schemas.openxmlformats.org/presentationml/2006/main">
-  <p:cSld>
-    <p:spTree>
-      <p:nvGrpSpPr>
-        <p:cNvPr id="1" name="">
-          <a:extLst>
-            <a:ext uri="{FF2B5EF4-FFF2-40B4-BE49-F238E27FC236}">
-              <a16:creationId xmlns:a16="http://schemas.microsoft.com/office/drawing/2014/main" id="{899E9E5D-0456-0DB6-4E60-A589E40854C5}"/>
-            </a:ext>
-          </a:extLst>
-        </p:cNvPr>
-        <p:cNvGrpSpPr/>
-        <p:nvPr/>
-      </p:nvGrpSpPr>
-      <p:grpSpPr>
-        <a:xfrm>
-          <a:off x="0" y="0"/>
-          <a:ext cx="0" cy="0"/>
-          <a:chOff x="0" y="0"/>
-          <a:chExt cx="0" cy="0"/>
-        </a:xfrm>
-      </p:grpSpPr>
-      <p:pic>
-        <p:nvPicPr>
-          <p:cNvPr id="3" name="Imagen 2">
-            <a:extLst>
-              <a:ext uri="{FF2B5EF4-FFF2-40B4-BE49-F238E27FC236}">
-                <a16:creationId xmlns:a16="http://schemas.microsoft.com/office/drawing/2014/main" id="{EA5B3FF0-38B8-51CC-F0BF-4B80582FE735}"/>
-              </a:ext>
-            </a:extLst>
-          </p:cNvPr>
-          <p:cNvPicPr>
-            <a:picLocks noChangeAspect="1"/>
-          </p:cNvPicPr>
-          <p:nvPr/>
-        </p:nvPicPr>
-        <p:blipFill>
-          <a:blip r:embed="rId2"/>
-          <a:stretch>
-            <a:fillRect/>
-          </a:stretch>
-        </p:blipFill>
-        <p:spPr>
-          <a:xfrm>
-            <a:off x="0" y="0"/>
-            <a:ext cx="12192000" cy="6857999"/>
-          </a:xfrm>
-          <a:prstGeom prst="rect">
-            <a:avLst/>
-          </a:prstGeom>
-        </p:spPr>
-      </p:pic>
-    </p:spTree>
-    <p:extLst>
-      <p:ext uri="{BB962C8B-B14F-4D97-AF65-F5344CB8AC3E}">
-        <p14:creationId xmlns:p14="http://schemas.microsoft.com/office/powerpoint/2010/main" val="2662152632"/>
-      </p:ext>
-    </p:extLst>
-  </p:cSld>
-  <p:clrMapOvr>
-    <a:masterClrMapping/>
-  </p:clrMapOvr>
-</p:sld>
-</file>
-
-<file path=ppt/slides/slide20.xml><?xml version="1.0" encoding="utf-8"?>
+<file path=ppt/slides/slide19.xml><?xml version="1.0" encoding="utf-8"?>
 <p:sld xmlns:a="http://schemas.openxmlformats.org/drawingml/2006/main" xmlns:r="http://schemas.openxmlformats.org/officeDocument/2006/relationships" xmlns:p="http://schemas.openxmlformats.org/presentationml/2006/main">
   <p:cSld>
     <p:spTree>
@@ -4201,7 +4074,73 @@
 </p:sld>
 </file>
 
-<file path=ppt/slides/slide21.xml><?xml version="1.0" encoding="utf-8"?>
+<file path=ppt/slides/slide2.xml><?xml version="1.0" encoding="utf-8"?>
+<p:sld xmlns:a="http://schemas.openxmlformats.org/drawingml/2006/main" xmlns:r="http://schemas.openxmlformats.org/officeDocument/2006/relationships" xmlns:p="http://schemas.openxmlformats.org/presentationml/2006/main">
+  <p:cSld>
+    <p:spTree>
+      <p:nvGrpSpPr>
+        <p:cNvPr id="1" name="">
+          <a:extLst>
+            <a:ext uri="{FF2B5EF4-FFF2-40B4-BE49-F238E27FC236}">
+              <a16:creationId xmlns:a16="http://schemas.microsoft.com/office/drawing/2014/main" id="{8B3BA40A-4CA8-90FA-495E-B93F5461B1AD}"/>
+            </a:ext>
+          </a:extLst>
+        </p:cNvPr>
+        <p:cNvGrpSpPr/>
+        <p:nvPr/>
+      </p:nvGrpSpPr>
+      <p:grpSpPr>
+        <a:xfrm>
+          <a:off x="0" y="0"/>
+          <a:ext cx="0" cy="0"/>
+          <a:chOff x="0" y="0"/>
+          <a:chExt cx="0" cy="0"/>
+        </a:xfrm>
+      </p:grpSpPr>
+      <p:pic>
+        <p:nvPicPr>
+          <p:cNvPr id="3" name="Imagen 2">
+            <a:extLst>
+              <a:ext uri="{FF2B5EF4-FFF2-40B4-BE49-F238E27FC236}">
+                <a16:creationId xmlns:a16="http://schemas.microsoft.com/office/drawing/2014/main" id="{1BE8E76A-1FC4-D511-9024-FF0F48502286}"/>
+              </a:ext>
+            </a:extLst>
+          </p:cNvPr>
+          <p:cNvPicPr>
+            <a:picLocks noChangeAspect="1"/>
+          </p:cNvPicPr>
+          <p:nvPr/>
+        </p:nvPicPr>
+        <p:blipFill>
+          <a:blip r:embed="rId2"/>
+          <a:stretch>
+            <a:fillRect/>
+          </a:stretch>
+        </p:blipFill>
+        <p:spPr>
+          <a:xfrm>
+            <a:off x="0" y="0"/>
+            <a:ext cx="12192000" cy="6858000"/>
+          </a:xfrm>
+          <a:prstGeom prst="rect">
+            <a:avLst/>
+          </a:prstGeom>
+        </p:spPr>
+      </p:pic>
+    </p:spTree>
+    <p:extLst>
+      <p:ext uri="{BB962C8B-B14F-4D97-AF65-F5344CB8AC3E}">
+        <p14:creationId xmlns:p14="http://schemas.microsoft.com/office/powerpoint/2010/main" val="1471351432"/>
+      </p:ext>
+    </p:extLst>
+  </p:cSld>
+  <p:clrMapOvr>
+    <a:masterClrMapping/>
+  </p:clrMapOvr>
+</p:sld>
+</file>
+
+<file path=ppt/slides/slide20.xml><?xml version="1.0" encoding="utf-8"?>
 <p:sld xmlns:a="http://schemas.openxmlformats.org/drawingml/2006/main" xmlns:r="http://schemas.openxmlformats.org/officeDocument/2006/relationships" xmlns:p="http://schemas.openxmlformats.org/presentationml/2006/main">
   <p:cSld>
     <p:spTree>
@@ -4267,7 +4206,7 @@
 </p:sld>
 </file>
 
-<file path=ppt/slides/slide22.xml><?xml version="1.0" encoding="utf-8"?>
+<file path=ppt/slides/slide21.xml><?xml version="1.0" encoding="utf-8"?>
 <p:sld xmlns:a="http://schemas.openxmlformats.org/drawingml/2006/main" xmlns:r="http://schemas.openxmlformats.org/officeDocument/2006/relationships" xmlns:p="http://schemas.openxmlformats.org/presentationml/2006/main">
   <p:cSld>
     <p:spTree>
@@ -4333,7 +4272,7 @@
 </p:sld>
 </file>
 
-<file path=ppt/slides/slide23.xml><?xml version="1.0" encoding="utf-8"?>
+<file path=ppt/slides/slide22.xml><?xml version="1.0" encoding="utf-8"?>
 <p:sld xmlns:a="http://schemas.openxmlformats.org/drawingml/2006/main" xmlns:r="http://schemas.openxmlformats.org/officeDocument/2006/relationships" xmlns:p="http://schemas.openxmlformats.org/presentationml/2006/main">
   <p:cSld>
     <p:spTree>
@@ -4399,7 +4338,7 @@
 </p:sld>
 </file>
 
-<file path=ppt/slides/slide24.xml><?xml version="1.0" encoding="utf-8"?>
+<file path=ppt/slides/slide23.xml><?xml version="1.0" encoding="utf-8"?>
 <p:sld xmlns:a="http://schemas.openxmlformats.org/drawingml/2006/main" xmlns:r="http://schemas.openxmlformats.org/officeDocument/2006/relationships" xmlns:p="http://schemas.openxmlformats.org/presentationml/2006/main">
   <p:cSld>
     <p:spTree>
@@ -4456,6 +4395,72 @@
     <p:extLst>
       <p:ext uri="{BB962C8B-B14F-4D97-AF65-F5344CB8AC3E}">
         <p14:creationId xmlns:p14="http://schemas.microsoft.com/office/powerpoint/2010/main" val="3189470487"/>
+      </p:ext>
+    </p:extLst>
+  </p:cSld>
+  <p:clrMapOvr>
+    <a:masterClrMapping/>
+  </p:clrMapOvr>
+</p:sld>
+</file>
+
+<file path=ppt/slides/slide24.xml><?xml version="1.0" encoding="utf-8"?>
+<p:sld xmlns:a="http://schemas.openxmlformats.org/drawingml/2006/main" xmlns:r="http://schemas.openxmlformats.org/officeDocument/2006/relationships" xmlns:p="http://schemas.openxmlformats.org/presentationml/2006/main">
+  <p:cSld>
+    <p:spTree>
+      <p:nvGrpSpPr>
+        <p:cNvPr id="1" name="">
+          <a:extLst>
+            <a:ext uri="{FF2B5EF4-FFF2-40B4-BE49-F238E27FC236}">
+              <a16:creationId xmlns:a16="http://schemas.microsoft.com/office/drawing/2014/main" id="{899E9E5D-0456-0DB6-4E60-A589E40854C5}"/>
+            </a:ext>
+          </a:extLst>
+        </p:cNvPr>
+        <p:cNvGrpSpPr/>
+        <p:nvPr/>
+      </p:nvGrpSpPr>
+      <p:grpSpPr>
+        <a:xfrm>
+          <a:off x="0" y="0"/>
+          <a:ext cx="0" cy="0"/>
+          <a:chOff x="0" y="0"/>
+          <a:chExt cx="0" cy="0"/>
+        </a:xfrm>
+      </p:grpSpPr>
+      <p:pic>
+        <p:nvPicPr>
+          <p:cNvPr id="3" name="Imagen 2">
+            <a:extLst>
+              <a:ext uri="{FF2B5EF4-FFF2-40B4-BE49-F238E27FC236}">
+                <a16:creationId xmlns:a16="http://schemas.microsoft.com/office/drawing/2014/main" id="{EA5B3FF0-38B8-51CC-F0BF-4B80582FE735}"/>
+              </a:ext>
+            </a:extLst>
+          </p:cNvPr>
+          <p:cNvPicPr>
+            <a:picLocks noChangeAspect="1"/>
+          </p:cNvPicPr>
+          <p:nvPr/>
+        </p:nvPicPr>
+        <p:blipFill>
+          <a:blip r:embed="rId2"/>
+          <a:stretch>
+            <a:fillRect/>
+          </a:stretch>
+        </p:blipFill>
+        <p:spPr>
+          <a:xfrm>
+            <a:off x="0" y="0"/>
+            <a:ext cx="12192000" cy="6857999"/>
+          </a:xfrm>
+          <a:prstGeom prst="rect">
+            <a:avLst/>
+          </a:prstGeom>
+        </p:spPr>
+      </p:pic>
+    </p:spTree>
+    <p:extLst>
+      <p:ext uri="{BB962C8B-B14F-4D97-AF65-F5344CB8AC3E}">
+        <p14:creationId xmlns:p14="http://schemas.microsoft.com/office/powerpoint/2010/main" val="2662152632"/>
       </p:ext>
     </p:extLst>
   </p:cSld>
@@ -4539,72 +4544,6 @@
         <p:cNvPr id="1" name="">
           <a:extLst>
             <a:ext uri="{FF2B5EF4-FFF2-40B4-BE49-F238E27FC236}">
-              <a16:creationId xmlns:a16="http://schemas.microsoft.com/office/drawing/2014/main" id="{8B3BA40A-4CA8-90FA-495E-B93F5461B1AD}"/>
-            </a:ext>
-          </a:extLst>
-        </p:cNvPr>
-        <p:cNvGrpSpPr/>
-        <p:nvPr/>
-      </p:nvGrpSpPr>
-      <p:grpSpPr>
-        <a:xfrm>
-          <a:off x="0" y="0"/>
-          <a:ext cx="0" cy="0"/>
-          <a:chOff x="0" y="0"/>
-          <a:chExt cx="0" cy="0"/>
-        </a:xfrm>
-      </p:grpSpPr>
-      <p:pic>
-        <p:nvPicPr>
-          <p:cNvPr id="3" name="Imagen 2">
-            <a:extLst>
-              <a:ext uri="{FF2B5EF4-FFF2-40B4-BE49-F238E27FC236}">
-                <a16:creationId xmlns:a16="http://schemas.microsoft.com/office/drawing/2014/main" id="{1BE8E76A-1FC4-D511-9024-FF0F48502286}"/>
-              </a:ext>
-            </a:extLst>
-          </p:cNvPr>
-          <p:cNvPicPr>
-            <a:picLocks noChangeAspect="1"/>
-          </p:cNvPicPr>
-          <p:nvPr/>
-        </p:nvPicPr>
-        <p:blipFill>
-          <a:blip r:embed="rId2"/>
-          <a:stretch>
-            <a:fillRect/>
-          </a:stretch>
-        </p:blipFill>
-        <p:spPr>
-          <a:xfrm>
-            <a:off x="0" y="0"/>
-            <a:ext cx="12192000" cy="6858000"/>
-          </a:xfrm>
-          <a:prstGeom prst="rect">
-            <a:avLst/>
-          </a:prstGeom>
-        </p:spPr>
-      </p:pic>
-    </p:spTree>
-    <p:extLst>
-      <p:ext uri="{BB962C8B-B14F-4D97-AF65-F5344CB8AC3E}">
-        <p14:creationId xmlns:p14="http://schemas.microsoft.com/office/powerpoint/2010/main" val="1471351432"/>
-      </p:ext>
-    </p:extLst>
-  </p:cSld>
-  <p:clrMapOvr>
-    <a:masterClrMapping/>
-  </p:clrMapOvr>
-</p:sld>
-</file>
-
-<file path=ppt/slides/slide4.xml><?xml version="1.0" encoding="utf-8"?>
-<p:sld xmlns:a="http://schemas.openxmlformats.org/drawingml/2006/main" xmlns:r="http://schemas.openxmlformats.org/officeDocument/2006/relationships" xmlns:p="http://schemas.openxmlformats.org/presentationml/2006/main">
-  <p:cSld>
-    <p:spTree>
-      <p:nvGrpSpPr>
-        <p:cNvPr id="1" name="">
-          <a:extLst>
-            <a:ext uri="{FF2B5EF4-FFF2-40B4-BE49-F238E27FC236}">
               <a16:creationId xmlns:a16="http://schemas.microsoft.com/office/drawing/2014/main" id="{8F7D809C-D64B-F325-1588-A0112CC3BD52}"/>
             </a:ext>
           </a:extLst>
@@ -4663,7 +4602,7 @@
 </p:sld>
 </file>
 
-<file path=ppt/slides/slide5.xml><?xml version="1.0" encoding="utf-8"?>
+<file path=ppt/slides/slide4.xml><?xml version="1.0" encoding="utf-8"?>
 <p:sld xmlns:a="http://schemas.openxmlformats.org/drawingml/2006/main" xmlns:r="http://schemas.openxmlformats.org/officeDocument/2006/relationships" xmlns:p="http://schemas.openxmlformats.org/presentationml/2006/main">
   <p:cSld>
     <p:spTree>
@@ -4729,7 +4668,7 @@
 </p:sld>
 </file>
 
-<file path=ppt/slides/slide6.xml><?xml version="1.0" encoding="utf-8"?>
+<file path=ppt/slides/slide5.xml><?xml version="1.0" encoding="utf-8"?>
 <p:sld xmlns:a="http://schemas.openxmlformats.org/drawingml/2006/main" xmlns:r="http://schemas.openxmlformats.org/officeDocument/2006/relationships" xmlns:p="http://schemas.openxmlformats.org/presentationml/2006/main">
   <p:cSld>
     <p:spTree>
@@ -4795,7 +4734,7 @@
 </p:sld>
 </file>
 
-<file path=ppt/slides/slide7.xml><?xml version="1.0" encoding="utf-8"?>
+<file path=ppt/slides/slide6.xml><?xml version="1.0" encoding="utf-8"?>
 <p:sld xmlns:a="http://schemas.openxmlformats.org/drawingml/2006/main" xmlns:r="http://schemas.openxmlformats.org/officeDocument/2006/relationships" xmlns:p="http://schemas.openxmlformats.org/presentationml/2006/main">
   <p:cSld>
     <p:spTree>
@@ -4861,7 +4800,7 @@
 </p:sld>
 </file>
 
-<file path=ppt/slides/slide8.xml><?xml version="1.0" encoding="utf-8"?>
+<file path=ppt/slides/slide7.xml><?xml version="1.0" encoding="utf-8"?>
 <p:sld xmlns:a="http://schemas.openxmlformats.org/drawingml/2006/main" xmlns:r="http://schemas.openxmlformats.org/officeDocument/2006/relationships" xmlns:p="http://schemas.openxmlformats.org/presentationml/2006/main">
   <p:cSld>
     <p:spTree>
@@ -4927,7 +4866,7 @@
 </p:sld>
 </file>
 
-<file path=ppt/slides/slide9.xml><?xml version="1.0" encoding="utf-8"?>
+<file path=ppt/slides/slide8.xml><?xml version="1.0" encoding="utf-8"?>
 <p:sld xmlns:a="http://schemas.openxmlformats.org/drawingml/2006/main" xmlns:r="http://schemas.openxmlformats.org/officeDocument/2006/relationships" xmlns:p="http://schemas.openxmlformats.org/presentationml/2006/main">
   <p:cSld>
     <p:spTree>
@@ -4984,6 +4923,72 @@
     <p:extLst>
       <p:ext uri="{BB962C8B-B14F-4D97-AF65-F5344CB8AC3E}">
         <p14:creationId xmlns:p14="http://schemas.microsoft.com/office/powerpoint/2010/main" val="3643563939"/>
+      </p:ext>
+    </p:extLst>
+  </p:cSld>
+  <p:clrMapOvr>
+    <a:masterClrMapping/>
+  </p:clrMapOvr>
+</p:sld>
+</file>
+
+<file path=ppt/slides/slide9.xml><?xml version="1.0" encoding="utf-8"?>
+<p:sld xmlns:a="http://schemas.openxmlformats.org/drawingml/2006/main" xmlns:r="http://schemas.openxmlformats.org/officeDocument/2006/relationships" xmlns:p="http://schemas.openxmlformats.org/presentationml/2006/main">
+  <p:cSld>
+    <p:spTree>
+      <p:nvGrpSpPr>
+        <p:cNvPr id="1" name="">
+          <a:extLst>
+            <a:ext uri="{FF2B5EF4-FFF2-40B4-BE49-F238E27FC236}">
+              <a16:creationId xmlns:a16="http://schemas.microsoft.com/office/drawing/2014/main" id="{7C29125E-EF22-B0FB-EC1C-611DF9C262B3}"/>
+            </a:ext>
+          </a:extLst>
+        </p:cNvPr>
+        <p:cNvGrpSpPr/>
+        <p:nvPr/>
+      </p:nvGrpSpPr>
+      <p:grpSpPr>
+        <a:xfrm>
+          <a:off x="0" y="0"/>
+          <a:ext cx="0" cy="0"/>
+          <a:chOff x="0" y="0"/>
+          <a:chExt cx="0" cy="0"/>
+        </a:xfrm>
+      </p:grpSpPr>
+      <p:pic>
+        <p:nvPicPr>
+          <p:cNvPr id="3" name="Imagen 2">
+            <a:extLst>
+              <a:ext uri="{FF2B5EF4-FFF2-40B4-BE49-F238E27FC236}">
+                <a16:creationId xmlns:a16="http://schemas.microsoft.com/office/drawing/2014/main" id="{CA88DB13-AB86-0353-0DDB-29B62B1BA7F7}"/>
+              </a:ext>
+            </a:extLst>
+          </p:cNvPr>
+          <p:cNvPicPr>
+            <a:picLocks noChangeAspect="1"/>
+          </p:cNvPicPr>
+          <p:nvPr/>
+        </p:nvPicPr>
+        <p:blipFill>
+          <a:blip r:embed="rId2"/>
+          <a:stretch>
+            <a:fillRect/>
+          </a:stretch>
+        </p:blipFill>
+        <p:spPr>
+          <a:xfrm>
+            <a:off x="0" y="0"/>
+            <a:ext cx="12192000" cy="6858000"/>
+          </a:xfrm>
+          <a:prstGeom prst="rect">
+            <a:avLst/>
+          </a:prstGeom>
+        </p:spPr>
+      </p:pic>
+    </p:spTree>
+    <p:extLst>
+      <p:ext uri="{BB962C8B-B14F-4D97-AF65-F5344CB8AC3E}">
+        <p14:creationId xmlns:p14="http://schemas.microsoft.com/office/powerpoint/2010/main" val="2943224096"/>
       </p:ext>
     </p:extLst>
   </p:cSld>
